--- a/CA2 Walkthrough.pptx
+++ b/CA2 Walkthrough.pptx
@@ -132,7 +132,7 @@
 <file path=ppt/revisionInfo.xml><?xml version="1.0" encoding="utf-8"?>
 <p1510:revInfo xmlns:a="http://schemas.openxmlformats.org/drawingml/2006/main" xmlns:r="http://schemas.openxmlformats.org/officeDocument/2006/relationships" xmlns:p1510="http://schemas.microsoft.com/office/powerpoint/2015/10/main">
   <p1510:revLst>
-    <p1510:client id="{0BFA0BEF-D199-4FE0-8730-DA8F34E47C79}" v="34" dt="2026-04-07T18:22:09.525"/>
+    <p1510:client id="{0BFA0BEF-D199-4FE0-8730-DA8F34E47C79}" v="36" dt="2026-04-10T09:24:22.515"/>
   </p1510:revLst>
 </p1510:revInfo>
 </file>
@@ -293,7 +293,7 @@
   <pc:docChgLst>
     <pc:chgData name="Oisin Gibson - STUDENT" userId="ed51d723-880b-49b1-825d-dc1bedda07ba" providerId="ADAL" clId="{E4D07E4E-783C-4601-A338-0E4D6EF743E3}"/>
     <pc:docChg chg="undo custSel addSld modSld">
-      <pc:chgData name="Oisin Gibson - STUDENT" userId="ed51d723-880b-49b1-825d-dc1bedda07ba" providerId="ADAL" clId="{E4D07E4E-783C-4601-A338-0E4D6EF743E3}" dt="2026-04-07T18:41:09.614" v="4923" actId="26606"/>
+      <pc:chgData name="Oisin Gibson - STUDENT" userId="ed51d723-880b-49b1-825d-dc1bedda07ba" providerId="ADAL" clId="{E4D07E4E-783C-4601-A338-0E4D6EF743E3}" dt="2026-04-10T09:24:30.907" v="4931" actId="26606"/>
       <pc:docMkLst>
         <pc:docMk/>
       </pc:docMkLst>
@@ -702,14 +702,6 @@
             <ac:spMk id="2" creationId="{AD5F6F56-6D7A-28BE-5308-E1EB4395F936}"/>
           </ac:spMkLst>
         </pc:spChg>
-        <pc:spChg chg="del mod">
-          <ac:chgData name="Oisin Gibson - STUDENT" userId="ed51d723-880b-49b1-825d-dc1bedda07ba" providerId="ADAL" clId="{E4D07E4E-783C-4601-A338-0E4D6EF743E3}" dt="2026-04-07T18:13:56.222" v="4573" actId="26606"/>
-          <ac:spMkLst>
-            <pc:docMk/>
-            <pc:sldMk cId="1441511703" sldId="265"/>
-            <ac:spMk id="3" creationId="{335B5E27-D5A8-A68D-002C-AAF9F1B37A20}"/>
-          </ac:spMkLst>
-        </pc:spChg>
         <pc:spChg chg="add">
           <ac:chgData name="Oisin Gibson - STUDENT" userId="ed51d723-880b-49b1-825d-dc1bedda07ba" providerId="ADAL" clId="{E4D07E4E-783C-4601-A338-0E4D6EF743E3}" dt="2026-04-07T18:13:56.222" v="4573" actId="26606"/>
           <ac:spMkLst>
@@ -743,58 +735,122 @@
           </ac:cxnSpMkLst>
         </pc:cxnChg>
       </pc:sldChg>
-      <pc:sldChg chg="addSp delSp modSp new mod setBg modNotesTx">
-        <pc:chgData name="Oisin Gibson - STUDENT" userId="ed51d723-880b-49b1-825d-dc1bedda07ba" providerId="ADAL" clId="{E4D07E4E-783C-4601-A338-0E4D6EF743E3}" dt="2026-04-07T18:14:00.267" v="4574" actId="26606"/>
+      <pc:sldChg chg="addSp delSp modSp new mod setBg setClrOvrMap modNotesTx">
+        <pc:chgData name="Oisin Gibson - STUDENT" userId="ed51d723-880b-49b1-825d-dc1bedda07ba" providerId="ADAL" clId="{E4D07E4E-783C-4601-A338-0E4D6EF743E3}" dt="2026-04-10T09:24:30.907" v="4931" actId="26606"/>
         <pc:sldMkLst>
           <pc:docMk/>
           <pc:sldMk cId="1661221485" sldId="266"/>
         </pc:sldMkLst>
         <pc:spChg chg="mod">
-          <ac:chgData name="Oisin Gibson - STUDENT" userId="ed51d723-880b-49b1-825d-dc1bedda07ba" providerId="ADAL" clId="{E4D07E4E-783C-4601-A338-0E4D6EF743E3}" dt="2026-04-07T18:14:00.267" v="4574" actId="26606"/>
+          <ac:chgData name="Oisin Gibson - STUDENT" userId="ed51d723-880b-49b1-825d-dc1bedda07ba" providerId="ADAL" clId="{E4D07E4E-783C-4601-A338-0E4D6EF743E3}" dt="2026-04-10T09:17:37.894" v="4927" actId="26606"/>
           <ac:spMkLst>
             <pc:docMk/>
             <pc:sldMk cId="1661221485" sldId="266"/>
             <ac:spMk id="2" creationId="{D46FA479-45B9-E724-9789-338CD13B8472}"/>
           </ac:spMkLst>
         </pc:spChg>
-        <pc:spChg chg="del mod">
-          <ac:chgData name="Oisin Gibson - STUDENT" userId="ed51d723-880b-49b1-825d-dc1bedda07ba" providerId="ADAL" clId="{E4D07E4E-783C-4601-A338-0E4D6EF743E3}" dt="2026-04-07T18:14:00.267" v="4574" actId="26606"/>
-          <ac:spMkLst>
-            <pc:docMk/>
-            <pc:sldMk cId="1661221485" sldId="266"/>
-            <ac:spMk id="3" creationId="{585CB534-4202-16D6-409F-EEDCB32B00DC}"/>
-          </ac:spMkLst>
-        </pc:spChg>
-        <pc:spChg chg="add">
-          <ac:chgData name="Oisin Gibson - STUDENT" userId="ed51d723-880b-49b1-825d-dc1bedda07ba" providerId="ADAL" clId="{E4D07E4E-783C-4601-A338-0E4D6EF743E3}" dt="2026-04-07T18:14:00.267" v="4574" actId="26606"/>
+        <pc:spChg chg="add del">
+          <ac:chgData name="Oisin Gibson - STUDENT" userId="ed51d723-880b-49b1-825d-dc1bedda07ba" providerId="ADAL" clId="{E4D07E4E-783C-4601-A338-0E4D6EF743E3}" dt="2026-04-10T09:17:37.894" v="4927" actId="26606"/>
           <ac:spMkLst>
             <pc:docMk/>
             <pc:sldMk cId="1661221485" sldId="266"/>
             <ac:spMk id="9" creationId="{88F0A37D-2337-4AAF-98B0-7E4E9B98719A}"/>
           </ac:spMkLst>
         </pc:spChg>
-        <pc:spChg chg="add">
-          <ac:chgData name="Oisin Gibson - STUDENT" userId="ed51d723-880b-49b1-825d-dc1bedda07ba" providerId="ADAL" clId="{E4D07E4E-783C-4601-A338-0E4D6EF743E3}" dt="2026-04-07T18:14:00.267" v="4574" actId="26606"/>
+        <pc:spChg chg="add del">
+          <ac:chgData name="Oisin Gibson - STUDENT" userId="ed51d723-880b-49b1-825d-dc1bedda07ba" providerId="ADAL" clId="{E4D07E4E-783C-4601-A338-0E4D6EF743E3}" dt="2026-04-10T09:17:37.894" v="4927" actId="26606"/>
           <ac:spMkLst>
             <pc:docMk/>
             <pc:sldMk cId="1661221485" sldId="266"/>
             <ac:spMk id="13" creationId="{F7234D70-FB65-4E99-985E-64D219674D45}"/>
           </ac:spMkLst>
         </pc:spChg>
-        <pc:graphicFrameChg chg="add">
-          <ac:chgData name="Oisin Gibson - STUDENT" userId="ed51d723-880b-49b1-825d-dc1bedda07ba" providerId="ADAL" clId="{E4D07E4E-783C-4601-A338-0E4D6EF743E3}" dt="2026-04-07T18:14:00.267" v="4574" actId="26606"/>
+        <pc:spChg chg="add del">
+          <ac:chgData name="Oisin Gibson - STUDENT" userId="ed51d723-880b-49b1-825d-dc1bedda07ba" providerId="ADAL" clId="{E4D07E4E-783C-4601-A338-0E4D6EF743E3}" dt="2026-04-10T09:17:37.856" v="4926" actId="26606"/>
+          <ac:spMkLst>
+            <pc:docMk/>
+            <pc:sldMk cId="1661221485" sldId="266"/>
+            <ac:spMk id="18" creationId="{E844E128-FF69-4E9F-8327-6B504B3C5AE1}"/>
+          </ac:spMkLst>
+        </pc:spChg>
+        <pc:spChg chg="add del">
+          <ac:chgData name="Oisin Gibson - STUDENT" userId="ed51d723-880b-49b1-825d-dc1bedda07ba" providerId="ADAL" clId="{E4D07E4E-783C-4601-A338-0E4D6EF743E3}" dt="2026-04-10T09:24:30.907" v="4931" actId="26606"/>
+          <ac:spMkLst>
+            <pc:docMk/>
+            <pc:sldMk cId="1661221485" sldId="266"/>
+            <ac:spMk id="22" creationId="{E844E128-FF69-4E9F-8327-6B504B3C5AE1}"/>
+          </ac:spMkLst>
+        </pc:spChg>
+        <pc:spChg chg="add">
+          <ac:chgData name="Oisin Gibson - STUDENT" userId="ed51d723-880b-49b1-825d-dc1bedda07ba" providerId="ADAL" clId="{E4D07E4E-783C-4601-A338-0E4D6EF743E3}" dt="2026-04-10T09:24:30.907" v="4931" actId="26606"/>
+          <ac:spMkLst>
+            <pc:docMk/>
+            <pc:sldMk cId="1661221485" sldId="266"/>
+            <ac:spMk id="28" creationId="{E844E128-FF69-4E9F-8327-6B504B3C5AE1}"/>
+          </ac:spMkLst>
+        </pc:spChg>
+        <pc:graphicFrameChg chg="add mod ord modGraphic">
+          <ac:chgData name="Oisin Gibson - STUDENT" userId="ed51d723-880b-49b1-825d-dc1bedda07ba" providerId="ADAL" clId="{E4D07E4E-783C-4601-A338-0E4D6EF743E3}" dt="2026-04-10T09:24:30.907" v="4931" actId="26606"/>
           <ac:graphicFrameMkLst>
             <pc:docMk/>
             <pc:sldMk cId="1661221485" sldId="266"/>
             <ac:graphicFrameMk id="5" creationId="{30F08F4C-2C06-1C8F-FB5A-BAFF6CBCD507}"/>
           </ac:graphicFrameMkLst>
         </pc:graphicFrameChg>
-        <pc:cxnChg chg="add">
-          <ac:chgData name="Oisin Gibson - STUDENT" userId="ed51d723-880b-49b1-825d-dc1bedda07ba" providerId="ADAL" clId="{E4D07E4E-783C-4601-A338-0E4D6EF743E3}" dt="2026-04-07T18:14:00.267" v="4574" actId="26606"/>
+        <pc:picChg chg="add del mod">
+          <ac:chgData name="Oisin Gibson - STUDENT" userId="ed51d723-880b-49b1-825d-dc1bedda07ba" providerId="ADAL" clId="{E4D07E4E-783C-4601-A338-0E4D6EF743E3}" dt="2026-04-10T09:24:18.735" v="4928" actId="21"/>
+          <ac:picMkLst>
+            <pc:docMk/>
+            <pc:sldMk cId="1661221485" sldId="266"/>
+            <ac:picMk id="4" creationId="{F194C55E-A6AC-BAFE-CEB8-449B183FB464}"/>
+          </ac:picMkLst>
+        </pc:picChg>
+        <pc:picChg chg="add">
+          <ac:chgData name="Oisin Gibson - STUDENT" userId="ed51d723-880b-49b1-825d-dc1bedda07ba" providerId="ADAL" clId="{E4D07E4E-783C-4601-A338-0E4D6EF743E3}" dt="2026-04-10T09:24:20.147" v="4929"/>
+          <ac:picMkLst>
+            <pc:docMk/>
+            <pc:sldMk cId="1661221485" sldId="266"/>
+            <ac:picMk id="6" creationId="{DAF7671D-A0C0-BDB5-0CA9-DDAA02A69482}"/>
+          </ac:picMkLst>
+        </pc:picChg>
+        <pc:picChg chg="add mod">
+          <ac:chgData name="Oisin Gibson - STUDENT" userId="ed51d723-880b-49b1-825d-dc1bedda07ba" providerId="ADAL" clId="{E4D07E4E-783C-4601-A338-0E4D6EF743E3}" dt="2026-04-10T09:24:30.907" v="4931" actId="26606"/>
+          <ac:picMkLst>
+            <pc:docMk/>
+            <pc:sldMk cId="1661221485" sldId="266"/>
+            <ac:picMk id="8" creationId="{17FCF148-320F-31E6-93DB-1BCB3BD823EB}"/>
+          </ac:picMkLst>
+        </pc:picChg>
+        <pc:cxnChg chg="add del">
+          <ac:chgData name="Oisin Gibson - STUDENT" userId="ed51d723-880b-49b1-825d-dc1bedda07ba" providerId="ADAL" clId="{E4D07E4E-783C-4601-A338-0E4D6EF743E3}" dt="2026-04-10T09:17:37.894" v="4927" actId="26606"/>
           <ac:cxnSpMkLst>
             <pc:docMk/>
             <pc:sldMk cId="1661221485" sldId="266"/>
             <ac:cxnSpMk id="11" creationId="{F15CCCF0-E573-463A-9760-1FDC0B2CFBD7}"/>
+          </ac:cxnSpMkLst>
+        </pc:cxnChg>
+        <pc:cxnChg chg="add del">
+          <ac:chgData name="Oisin Gibson - STUDENT" userId="ed51d723-880b-49b1-825d-dc1bedda07ba" providerId="ADAL" clId="{E4D07E4E-783C-4601-A338-0E4D6EF743E3}" dt="2026-04-10T09:17:37.856" v="4926" actId="26606"/>
+          <ac:cxnSpMkLst>
+            <pc:docMk/>
+            <pc:sldMk cId="1661221485" sldId="266"/>
+            <ac:cxnSpMk id="20" creationId="{055CEADF-09EA-423C-8C45-F94AF44D5AF0}"/>
+          </ac:cxnSpMkLst>
+        </pc:cxnChg>
+        <pc:cxnChg chg="add del">
+          <ac:chgData name="Oisin Gibson - STUDENT" userId="ed51d723-880b-49b1-825d-dc1bedda07ba" providerId="ADAL" clId="{E4D07E4E-783C-4601-A338-0E4D6EF743E3}" dt="2026-04-10T09:24:30.907" v="4931" actId="26606"/>
+          <ac:cxnSpMkLst>
+            <pc:docMk/>
+            <pc:sldMk cId="1661221485" sldId="266"/>
+            <ac:cxnSpMk id="23" creationId="{055CEADF-09EA-423C-8C45-F94AF44D5AF0}"/>
+          </ac:cxnSpMkLst>
+        </pc:cxnChg>
+        <pc:cxnChg chg="add">
+          <ac:chgData name="Oisin Gibson - STUDENT" userId="ed51d723-880b-49b1-825d-dc1bedda07ba" providerId="ADAL" clId="{E4D07E4E-783C-4601-A338-0E4D6EF743E3}" dt="2026-04-10T09:24:30.907" v="4931" actId="26606"/>
+          <ac:cxnSpMkLst>
+            <pc:docMk/>
+            <pc:sldMk cId="1661221485" sldId="266"/>
+            <ac:cxnSpMk id="30" creationId="{055CEADF-09EA-423C-8C45-F94AF44D5AF0}"/>
           </ac:cxnSpMkLst>
         </pc:cxnChg>
       </pc:sldChg>
@@ -810,14 +866,6 @@
             <pc:docMk/>
             <pc:sldMk cId="2398319061" sldId="267"/>
             <ac:spMk id="2" creationId="{9215CA2A-4B5B-A79B-BFF4-41D7D11D9EC4}"/>
-          </ac:spMkLst>
-        </pc:spChg>
-        <pc:spChg chg="del mod">
-          <ac:chgData name="Oisin Gibson - STUDENT" userId="ed51d723-880b-49b1-825d-dc1bedda07ba" providerId="ADAL" clId="{E4D07E4E-783C-4601-A338-0E4D6EF743E3}" dt="2026-04-07T18:21:50.402" v="4826" actId="26606"/>
-          <ac:spMkLst>
-            <pc:docMk/>
-            <pc:sldMk cId="2398319061" sldId="267"/>
-            <ac:spMk id="3" creationId="{744B13CE-4EB1-3B11-6275-56F05C25A111}"/>
           </ac:spMkLst>
         </pc:spChg>
         <pc:spChg chg="add">
@@ -969,46 +1017,6 @@
             <ac:spMk id="2" creationId="{39DBA170-2666-6BEE-245D-E7FFA90116A5}"/>
           </ac:spMkLst>
         </pc:spChg>
-        <pc:spChg chg="del mod">
-          <ac:chgData name="Oisin Gibson - STUDENT" userId="ed51d723-880b-49b1-825d-dc1bedda07ba" providerId="ADAL" clId="{E4D07E4E-783C-4601-A338-0E4D6EF743E3}" dt="2026-04-07T18:41:09.614" v="4923" actId="26606"/>
-          <ac:spMkLst>
-            <pc:docMk/>
-            <pc:sldMk cId="3125324398" sldId="270"/>
-            <ac:spMk id="3" creationId="{103CDF5D-B845-8FEF-2181-EE595A3BF088}"/>
-          </ac:spMkLst>
-        </pc:spChg>
-        <pc:spChg chg="add del">
-          <ac:chgData name="Oisin Gibson - STUDENT" userId="ed51d723-880b-49b1-825d-dc1bedda07ba" providerId="ADAL" clId="{E4D07E4E-783C-4601-A338-0E4D6EF743E3}" dt="2026-04-07T18:41:09.614" v="4923" actId="26606"/>
-          <ac:spMkLst>
-            <pc:docMk/>
-            <pc:sldMk cId="3125324398" sldId="270"/>
-            <ac:spMk id="10" creationId="{13BCCAE5-A35B-4B66-A4A7-E23C34A403A4}"/>
-          </ac:spMkLst>
-        </pc:spChg>
-        <pc:spChg chg="add del">
-          <ac:chgData name="Oisin Gibson - STUDENT" userId="ed51d723-880b-49b1-825d-dc1bedda07ba" providerId="ADAL" clId="{E4D07E4E-783C-4601-A338-0E4D6EF743E3}" dt="2026-04-07T18:41:09.614" v="4923" actId="26606"/>
-          <ac:spMkLst>
-            <pc:docMk/>
-            <pc:sldMk cId="3125324398" sldId="270"/>
-            <ac:spMk id="14" creationId="{0B2EDFE5-9478-4774-9D3D-FEC7DC7082EF}"/>
-          </ac:spMkLst>
-        </pc:spChg>
-        <pc:spChg chg="add del">
-          <ac:chgData name="Oisin Gibson - STUDENT" userId="ed51d723-880b-49b1-825d-dc1bedda07ba" providerId="ADAL" clId="{E4D07E4E-783C-4601-A338-0E4D6EF743E3}" dt="2026-04-07T18:41:09.596" v="4922" actId="26606"/>
-          <ac:spMkLst>
-            <pc:docMk/>
-            <pc:sldMk cId="3125324398" sldId="270"/>
-            <ac:spMk id="19" creationId="{08CB54FC-0B2A-4107-9A70-958B90B76585}"/>
-          </ac:spMkLst>
-        </pc:spChg>
-        <pc:spChg chg="add del">
-          <ac:chgData name="Oisin Gibson - STUDENT" userId="ed51d723-880b-49b1-825d-dc1bedda07ba" providerId="ADAL" clId="{E4D07E4E-783C-4601-A338-0E4D6EF743E3}" dt="2026-04-07T18:41:09.596" v="4922" actId="26606"/>
-          <ac:spMkLst>
-            <pc:docMk/>
-            <pc:sldMk cId="3125324398" sldId="270"/>
-            <ac:spMk id="23" creationId="{9AA76026-5689-4584-8D93-D71D739E61B5}"/>
-          </ac:spMkLst>
-        </pc:spChg>
         <pc:spChg chg="add">
           <ac:chgData name="Oisin Gibson - STUDENT" userId="ed51d723-880b-49b1-825d-dc1bedda07ba" providerId="ADAL" clId="{E4D07E4E-783C-4601-A338-0E4D6EF743E3}" dt="2026-04-07T18:41:09.614" v="4923" actId="26606"/>
           <ac:spMkLst>
@@ -1041,22 +1049,6 @@
             <ac:picMk id="7" creationId="{6F39867E-6393-1C23-A66D-ACFA8A34991B}"/>
           </ac:picMkLst>
         </pc:picChg>
-        <pc:cxnChg chg="add del">
-          <ac:chgData name="Oisin Gibson - STUDENT" userId="ed51d723-880b-49b1-825d-dc1bedda07ba" providerId="ADAL" clId="{E4D07E4E-783C-4601-A338-0E4D6EF743E3}" dt="2026-04-07T18:41:09.614" v="4923" actId="26606"/>
-          <ac:cxnSpMkLst>
-            <pc:docMk/>
-            <pc:sldMk cId="3125324398" sldId="270"/>
-            <ac:cxnSpMk id="12" creationId="{6987BDFB-DE64-4B56-B44F-45FAE19FA94E}"/>
-          </ac:cxnSpMkLst>
-        </pc:cxnChg>
-        <pc:cxnChg chg="add del">
-          <ac:chgData name="Oisin Gibson - STUDENT" userId="ed51d723-880b-49b1-825d-dc1bedda07ba" providerId="ADAL" clId="{E4D07E4E-783C-4601-A338-0E4D6EF743E3}" dt="2026-04-07T18:41:09.596" v="4922" actId="26606"/>
-          <ac:cxnSpMkLst>
-            <pc:docMk/>
-            <pc:sldMk cId="3125324398" sldId="270"/>
-            <ac:cxnSpMk id="21" creationId="{7855A9B5-1710-4B19-B0F1-CDFDD4ED5B7E}"/>
-          </ac:cxnSpMkLst>
-        </pc:cxnChg>
         <pc:cxnChg chg="add">
           <ac:chgData name="Oisin Gibson - STUDENT" userId="ed51d723-880b-49b1-825d-dc1bedda07ba" providerId="ADAL" clId="{E4D07E4E-783C-4601-A338-0E4D6EF743E3}" dt="2026-04-07T18:41:09.614" v="4923" actId="26606"/>
           <ac:cxnSpMkLst>
@@ -1821,15 +1813,15 @@
 </file>
 
 <file path=ppt/diagrams/colors2.xml><?xml version="1.0" encoding="utf-8"?>
-<dgm:colorsDef xmlns:dgm="http://schemas.openxmlformats.org/drawingml/2006/diagram" xmlns:a="http://schemas.openxmlformats.org/drawingml/2006/main" uniqueId="urn:microsoft.com/office/officeart/2005/8/colors/colorful2">
+<dgm:colorsDef xmlns:dgm="http://schemas.openxmlformats.org/drawingml/2006/diagram" xmlns:a="http://schemas.openxmlformats.org/drawingml/2006/main" uniqueId="urn:microsoft.com/office/officeart/2005/8/colors/accent2_2">
   <dgm:title val=""/>
   <dgm:desc val=""/>
   <dgm:catLst>
-    <dgm:cat type="colorful" pri="10200"/>
+    <dgm:cat type="accent2" pri="11200"/>
   </dgm:catLst>
   <dgm:styleLbl name="node0">
     <dgm:fillClrLst meth="repeat">
-      <a:schemeClr val="accent1"/>
+      <a:schemeClr val="accent2"/>
     </dgm:fillClrLst>
     <dgm:linClrLst meth="repeat">
       <a:schemeClr val="lt1"/>
@@ -1840,9 +1832,8 @@
     <dgm:txEffectClrLst/>
   </dgm:styleLbl>
   <dgm:styleLbl name="node1">
-    <dgm:fillClrLst>
+    <dgm:fillClrLst meth="repeat">
       <a:schemeClr val="accent2"/>
-      <a:schemeClr val="accent3"/>
     </dgm:fillClrLst>
     <dgm:linClrLst meth="repeat">
       <a:schemeClr val="lt1"/>
@@ -1853,13 +1844,11 @@
     <dgm:txEffectClrLst/>
   </dgm:styleLbl>
   <dgm:styleLbl name="alignNode1">
-    <dgm:fillClrLst>
+    <dgm:fillClrLst meth="repeat">
       <a:schemeClr val="accent2"/>
-      <a:schemeClr val="accent3"/>
     </dgm:fillClrLst>
-    <dgm:linClrLst>
+    <dgm:linClrLst meth="repeat">
       <a:schemeClr val="accent2"/>
-      <a:schemeClr val="accent3"/>
     </dgm:linClrLst>
     <dgm:effectClrLst/>
     <dgm:txLinClrLst/>
@@ -1867,9 +1856,8 @@
     <dgm:txEffectClrLst/>
   </dgm:styleLbl>
   <dgm:styleLbl name="lnNode1">
-    <dgm:fillClrLst>
+    <dgm:fillClrLst meth="repeat">
       <a:schemeClr val="accent2"/>
-      <a:schemeClr val="accent3"/>
     </dgm:fillClrLst>
     <dgm:linClrLst meth="repeat">
       <a:schemeClr val="lt1"/>
@@ -1880,11 +1868,8 @@
     <dgm:txEffectClrLst/>
   </dgm:styleLbl>
   <dgm:styleLbl name="vennNode1">
-    <dgm:fillClrLst>
+    <dgm:fillClrLst meth="repeat">
       <a:schemeClr val="accent2">
-        <a:alpha val="50000"/>
-      </a:schemeClr>
-      <a:schemeClr val="accent3">
         <a:alpha val="50000"/>
       </a:schemeClr>
     </dgm:fillClrLst>
@@ -1897,8 +1882,8 @@
     <dgm:txEffectClrLst/>
   </dgm:styleLbl>
   <dgm:styleLbl name="node2">
-    <dgm:fillClrLst>
-      <a:schemeClr val="accent3"/>
+    <dgm:fillClrLst meth="repeat">
+      <a:schemeClr val="accent2"/>
     </dgm:fillClrLst>
     <dgm:linClrLst meth="repeat">
       <a:schemeClr val="lt1"/>
@@ -1909,8 +1894,8 @@
     <dgm:txEffectClrLst/>
   </dgm:styleLbl>
   <dgm:styleLbl name="node3">
-    <dgm:fillClrLst>
-      <a:schemeClr val="accent4"/>
+    <dgm:fillClrLst meth="repeat">
+      <a:schemeClr val="accent2"/>
     </dgm:fillClrLst>
     <dgm:linClrLst meth="repeat">
       <a:schemeClr val="lt1"/>
@@ -1921,8 +1906,8 @@
     <dgm:txEffectClrLst/>
   </dgm:styleLbl>
   <dgm:styleLbl name="node4">
-    <dgm:fillClrLst>
-      <a:schemeClr val="accent5"/>
+    <dgm:fillClrLst meth="repeat">
+      <a:schemeClr val="accent2"/>
     </dgm:fillClrLst>
     <dgm:linClrLst meth="repeat">
       <a:schemeClr val="lt1"/>
@@ -1933,11 +1918,8 @@
     <dgm:txEffectClrLst/>
   </dgm:styleLbl>
   <dgm:styleLbl name="fgImgPlace1">
-    <dgm:fillClrLst>
+    <dgm:fillClrLst meth="repeat">
       <a:schemeClr val="accent2">
-        <a:tint val="50000"/>
-      </a:schemeClr>
-      <a:schemeClr val="accent3">
         <a:tint val="50000"/>
       </a:schemeClr>
     </dgm:fillClrLst>
@@ -1952,12 +1934,9 @@
     <dgm:txEffectClrLst/>
   </dgm:styleLbl>
   <dgm:styleLbl name="alignImgPlace1">
-    <dgm:fillClrLst>
+    <dgm:fillClrLst meth="repeat">
       <a:schemeClr val="accent2">
         <a:tint val="50000"/>
-      </a:schemeClr>
-      <a:schemeClr val="accent3">
-        <a:tint val="20000"/>
       </a:schemeClr>
     </dgm:fillClrLst>
     <dgm:linClrLst meth="repeat">
@@ -1971,12 +1950,9 @@
     <dgm:txEffectClrLst/>
   </dgm:styleLbl>
   <dgm:styleLbl name="bgImgPlace1">
-    <dgm:fillClrLst>
+    <dgm:fillClrLst meth="repeat">
       <a:schemeClr val="accent2">
         <a:tint val="50000"/>
-      </a:schemeClr>
-      <a:schemeClr val="accent3">
-        <a:tint val="20000"/>
       </a:schemeClr>
     </dgm:fillClrLst>
     <dgm:linClrLst meth="repeat">
@@ -1990,12 +1966,15 @@
     <dgm:txEffectClrLst/>
   </dgm:styleLbl>
   <dgm:styleLbl name="sibTrans2D1">
-    <dgm:fillClrLst>
-      <a:schemeClr val="accent2"/>
-      <a:schemeClr val="accent3"/>
+    <dgm:fillClrLst meth="repeat">
+      <a:schemeClr val="accent2">
+        <a:tint val="60000"/>
+      </a:schemeClr>
     </dgm:fillClrLst>
     <dgm:linClrLst meth="repeat">
-      <a:schemeClr val="lt1"/>
+      <a:schemeClr val="accent2">
+        <a:tint val="60000"/>
+      </a:schemeClr>
     </dgm:linClrLst>
     <dgm:effectClrLst/>
     <dgm:txLinClrLst/>
@@ -2003,40 +1982,43 @@
     <dgm:txEffectClrLst/>
   </dgm:styleLbl>
   <dgm:styleLbl name="fgSibTrans2D1">
-    <dgm:fillClrLst>
-      <a:schemeClr val="accent2"/>
-      <a:schemeClr val="accent3"/>
+    <dgm:fillClrLst meth="repeat">
+      <a:schemeClr val="accent2">
+        <a:tint val="60000"/>
+      </a:schemeClr>
     </dgm:fillClrLst>
     <dgm:linClrLst meth="repeat">
-      <a:schemeClr val="lt1"/>
+      <a:schemeClr val="accent2">
+        <a:tint val="60000"/>
+      </a:schemeClr>
     </dgm:linClrLst>
     <dgm:effectClrLst/>
     <dgm:txLinClrLst/>
-    <dgm:txFillClrLst meth="repeat">
-      <a:schemeClr val="lt1"/>
-    </dgm:txFillClrLst>
+    <dgm:txFillClrLst/>
     <dgm:txEffectClrLst/>
   </dgm:styleLbl>
   <dgm:styleLbl name="bgSibTrans2D1">
-    <dgm:fillClrLst>
-      <a:schemeClr val="accent2"/>
-      <a:schemeClr val="accent3"/>
+    <dgm:fillClrLst meth="repeat">
+      <a:schemeClr val="accent2">
+        <a:tint val="60000"/>
+      </a:schemeClr>
     </dgm:fillClrLst>
     <dgm:linClrLst meth="repeat">
-      <a:schemeClr val="lt1"/>
+      <a:schemeClr val="accent2">
+        <a:tint val="60000"/>
+      </a:schemeClr>
     </dgm:linClrLst>
     <dgm:effectClrLst/>
     <dgm:txLinClrLst/>
-    <dgm:txFillClrLst meth="repeat">
-      <a:schemeClr val="lt1"/>
-    </dgm:txFillClrLst>
+    <dgm:txFillClrLst/>
     <dgm:txEffectClrLst/>
   </dgm:styleLbl>
   <dgm:styleLbl name="sibTrans1D1">
-    <dgm:fillClrLst/>
-    <dgm:linClrLst>
+    <dgm:fillClrLst meth="repeat">
       <a:schemeClr val="accent2"/>
-      <a:schemeClr val="accent3"/>
+    </dgm:fillClrLst>
+    <dgm:linClrLst meth="repeat">
+      <a:schemeClr val="accent2"/>
     </dgm:linClrLst>
     <dgm:effectClrLst/>
     <dgm:txLinClrLst/>
@@ -2066,9 +2048,7 @@
       <a:schemeClr val="accent2"/>
     </dgm:fillClrLst>
     <dgm:linClrLst meth="repeat">
-      <a:schemeClr val="lt1">
-        <a:shade val="80000"/>
-      </a:schemeClr>
+      <a:schemeClr val="lt1"/>
     </dgm:linClrLst>
     <dgm:effectClrLst/>
     <dgm:txLinClrLst/>
@@ -2077,21 +2057,7 @@
   </dgm:styleLbl>
   <dgm:styleLbl name="asst1">
     <dgm:fillClrLst meth="repeat">
-      <a:schemeClr val="accent3"/>
-    </dgm:fillClrLst>
-    <dgm:linClrLst meth="repeat">
-      <a:schemeClr val="lt1">
-        <a:shade val="80000"/>
-      </a:schemeClr>
-    </dgm:linClrLst>
-    <dgm:effectClrLst/>
-    <dgm:txLinClrLst/>
-    <dgm:txFillClrLst/>
-    <dgm:txEffectClrLst/>
-  </dgm:styleLbl>
-  <dgm:styleLbl name="asst2">
-    <dgm:fillClrLst>
-      <a:schemeClr val="accent4"/>
+      <a:schemeClr val="accent2"/>
     </dgm:fillClrLst>
     <dgm:linClrLst meth="repeat">
       <a:schemeClr val="lt1"/>
@@ -2101,9 +2067,9 @@
     <dgm:txFillClrLst/>
     <dgm:txEffectClrLst/>
   </dgm:styleLbl>
-  <dgm:styleLbl name="asst3">
-    <dgm:fillClrLst>
-      <a:schemeClr val="accent5"/>
+  <dgm:styleLbl name="asst2">
+    <dgm:fillClrLst meth="repeat">
+      <a:schemeClr val="accent2"/>
     </dgm:fillClrLst>
     <dgm:linClrLst meth="repeat">
       <a:schemeClr val="lt1"/>
@@ -2113,9 +2079,9 @@
     <dgm:txFillClrLst/>
     <dgm:txEffectClrLst/>
   </dgm:styleLbl>
-  <dgm:styleLbl name="asst4">
-    <dgm:fillClrLst>
-      <a:schemeClr val="accent6"/>
+  <dgm:styleLbl name="asst3">
+    <dgm:fillClrLst meth="repeat">
+      <a:schemeClr val="accent2"/>
     </dgm:fillClrLst>
     <dgm:linClrLst meth="repeat">
       <a:schemeClr val="lt1"/>
@@ -2125,7 +2091,7 @@
     <dgm:txFillClrLst/>
     <dgm:txEffectClrLst/>
   </dgm:styleLbl>
-  <dgm:styleLbl name="parChTrans2D1">
+  <dgm:styleLbl name="asst4">
     <dgm:fillClrLst meth="repeat">
       <a:schemeClr val="accent2"/>
     </dgm:fillClrLst>
@@ -2134,41 +2100,19 @@
     </dgm:linClrLst>
     <dgm:effectClrLst/>
     <dgm:txLinClrLst/>
-    <dgm:txFillClrLst meth="repeat">
-      <a:schemeClr val="lt1"/>
-    </dgm:txFillClrLst>
+    <dgm:txFillClrLst/>
     <dgm:txEffectClrLst/>
   </dgm:styleLbl>
-  <dgm:styleLbl name="parChTrans2D2">
+  <dgm:styleLbl name="parChTrans2D1">
     <dgm:fillClrLst meth="repeat">
-      <a:schemeClr val="accent3"/>
+      <a:schemeClr val="accent2">
+        <a:tint val="60000"/>
+      </a:schemeClr>
     </dgm:fillClrLst>
     <dgm:linClrLst meth="repeat">
-      <a:schemeClr val="lt1"/>
-    </dgm:linClrLst>
-    <dgm:effectClrLst/>
-    <dgm:txLinClrLst/>
-    <dgm:txFillClrLst/>
-    <dgm:txEffectClrLst/>
-  </dgm:styleLbl>
-  <dgm:styleLbl name="parChTrans2D3">
-    <dgm:fillClrLst meth="repeat">
-      <a:schemeClr val="accent4"/>
-    </dgm:fillClrLst>
-    <dgm:linClrLst meth="repeat">
-      <a:schemeClr val="lt1"/>
-    </dgm:linClrLst>
-    <dgm:effectClrLst/>
-    <dgm:txLinClrLst/>
-    <dgm:txFillClrLst/>
-    <dgm:txEffectClrLst/>
-  </dgm:styleLbl>
-  <dgm:styleLbl name="parChTrans2D4">
-    <dgm:fillClrLst meth="repeat">
-      <a:schemeClr val="accent5"/>
-    </dgm:fillClrLst>
-    <dgm:linClrLst meth="repeat">
-      <a:schemeClr val="lt1"/>
+      <a:schemeClr val="accent2">
+        <a:tint val="60000"/>
+      </a:schemeClr>
     </dgm:linClrLst>
     <dgm:effectClrLst/>
     <dgm:txLinClrLst/>
@@ -2177,7 +2121,7 @@
     </dgm:txFillClrLst>
     <dgm:txEffectClrLst/>
   </dgm:styleLbl>
-  <dgm:styleLbl name="parChTrans1D1">
+  <dgm:styleLbl name="parChTrans2D2">
     <dgm:fillClrLst meth="repeat">
       <a:schemeClr val="accent2"/>
     </dgm:fillClrLst>
@@ -2187,18 +2131,46 @@
     <dgm:effectClrLst/>
     <dgm:txLinClrLst/>
     <dgm:txFillClrLst meth="repeat">
-      <a:schemeClr val="tx1"/>
+      <a:schemeClr val="lt1"/>
     </dgm:txFillClrLst>
     <dgm:txEffectClrLst/>
   </dgm:styleLbl>
-  <dgm:styleLbl name="parChTrans1D2">
+  <dgm:styleLbl name="parChTrans2D3">
     <dgm:fillClrLst meth="repeat">
-      <a:schemeClr val="accent2">
-        <a:tint val="90000"/>
-      </a:schemeClr>
+      <a:schemeClr val="accent2"/>
     </dgm:fillClrLst>
     <dgm:linClrLst meth="repeat">
-      <a:schemeClr val="accent3"/>
+      <a:schemeClr val="accent2"/>
+    </dgm:linClrLst>
+    <dgm:effectClrLst/>
+    <dgm:txLinClrLst/>
+    <dgm:txFillClrLst meth="repeat">
+      <a:schemeClr val="lt1"/>
+    </dgm:txFillClrLst>
+    <dgm:txEffectClrLst/>
+  </dgm:styleLbl>
+  <dgm:styleLbl name="parChTrans2D4">
+    <dgm:fillClrLst meth="repeat">
+      <a:schemeClr val="accent2"/>
+    </dgm:fillClrLst>
+    <dgm:linClrLst meth="repeat">
+      <a:schemeClr val="accent2"/>
+    </dgm:linClrLst>
+    <dgm:effectClrLst/>
+    <dgm:txLinClrLst/>
+    <dgm:txFillClrLst meth="repeat">
+      <a:schemeClr val="lt1"/>
+    </dgm:txFillClrLst>
+    <dgm:txEffectClrLst/>
+  </dgm:styleLbl>
+  <dgm:styleLbl name="parChTrans1D1">
+    <dgm:fillClrLst meth="repeat">
+      <a:schemeClr val="accent2"/>
+    </dgm:fillClrLst>
+    <dgm:linClrLst meth="repeat">
+      <a:schemeClr val="accent2">
+        <a:shade val="60000"/>
+      </a:schemeClr>
     </dgm:linClrLst>
     <dgm:effectClrLst/>
     <dgm:txLinClrLst/>
@@ -2207,14 +2179,14 @@
     </dgm:txFillClrLst>
     <dgm:txEffectClrLst/>
   </dgm:styleLbl>
-  <dgm:styleLbl name="parChTrans1D3">
+  <dgm:styleLbl name="parChTrans1D2">
     <dgm:fillClrLst meth="repeat">
-      <a:schemeClr val="accent2">
-        <a:tint val="70000"/>
-      </a:schemeClr>
+      <a:schemeClr val="accent2"/>
     </dgm:fillClrLst>
     <dgm:linClrLst meth="repeat">
-      <a:schemeClr val="accent4"/>
+      <a:schemeClr val="accent2">
+        <a:shade val="60000"/>
+      </a:schemeClr>
     </dgm:linClrLst>
     <dgm:effectClrLst/>
     <dgm:txLinClrLst/>
@@ -2223,14 +2195,14 @@
     </dgm:txFillClrLst>
     <dgm:txEffectClrLst/>
   </dgm:styleLbl>
-  <dgm:styleLbl name="parChTrans1D4">
+  <dgm:styleLbl name="parChTrans1D3">
     <dgm:fillClrLst meth="repeat">
-      <a:schemeClr val="accent2">
-        <a:tint val="50000"/>
-      </a:schemeClr>
+      <a:schemeClr val="accent2"/>
     </dgm:fillClrLst>
     <dgm:linClrLst meth="repeat">
-      <a:schemeClr val="accent5"/>
+      <a:schemeClr val="accent2">
+        <a:shade val="80000"/>
+      </a:schemeClr>
     </dgm:linClrLst>
     <dgm:effectClrLst/>
     <dgm:txLinClrLst/>
@@ -2239,15 +2211,30 @@
     </dgm:txFillClrLst>
     <dgm:txEffectClrLst/>
   </dgm:styleLbl>
+  <dgm:styleLbl name="parChTrans1D4">
+    <dgm:fillClrLst meth="repeat">
+      <a:schemeClr val="accent2"/>
+    </dgm:fillClrLst>
+    <dgm:linClrLst meth="repeat">
+      <a:schemeClr val="accent2">
+        <a:shade val="80000"/>
+      </a:schemeClr>
+    </dgm:linClrLst>
+    <dgm:effectClrLst/>
+    <dgm:txLinClrLst/>
+    <dgm:txFillClrLst meth="repeat">
+      <a:schemeClr val="tx1"/>
+    </dgm:txFillClrLst>
+    <dgm:txEffectClrLst/>
+  </dgm:styleLbl>
   <dgm:styleLbl name="fgAcc1">
     <dgm:fillClrLst meth="repeat">
       <a:schemeClr val="lt1">
         <a:alpha val="90000"/>
       </a:schemeClr>
     </dgm:fillClrLst>
-    <dgm:linClrLst>
+    <dgm:linClrLst meth="repeat">
       <a:schemeClr val="accent2"/>
-      <a:schemeClr val="accent3"/>
     </dgm:linClrLst>
     <dgm:effectClrLst/>
     <dgm:txLinClrLst/>
@@ -2262,9 +2249,8 @@
         <a:alpha val="90000"/>
       </a:schemeClr>
     </dgm:fillClrLst>
-    <dgm:linClrLst>
+    <dgm:linClrLst meth="repeat">
       <a:schemeClr val="accent2"/>
-      <a:schemeClr val="accent3"/>
     </dgm:linClrLst>
     <dgm:effectClrLst/>
     <dgm:txLinClrLst/>
@@ -2279,9 +2265,8 @@
         <a:alpha val="90000"/>
       </a:schemeClr>
     </dgm:fillClrLst>
-    <dgm:linClrLst>
+    <dgm:linClrLst meth="repeat">
       <a:schemeClr val="accent2"/>
-      <a:schemeClr val="accent3"/>
     </dgm:linClrLst>
     <dgm:effectClrLst/>
     <dgm:txLinClrLst/>
@@ -2312,9 +2297,8 @@
         <a:alpha val="90000"/>
       </a:schemeClr>
     </dgm:fillClrLst>
-    <dgm:linClrLst>
+    <dgm:linClrLst meth="repeat">
       <a:schemeClr val="accent2"/>
-      <a:schemeClr val="accent3"/>
     </dgm:linClrLst>
     <dgm:effectClrLst/>
     <dgm:txLinClrLst/>
@@ -2327,9 +2311,8 @@
     <dgm:fillClrLst meth="repeat">
       <a:schemeClr val="lt1"/>
     </dgm:fillClrLst>
-    <dgm:linClrLst>
+    <dgm:linClrLst meth="repeat">
       <a:schemeClr val="accent2"/>
-      <a:schemeClr val="accent3"/>
     </dgm:linClrLst>
     <dgm:effectClrLst/>
     <dgm:txLinClrLst/>
@@ -2342,9 +2325,8 @@
     <dgm:fillClrLst meth="repeat">
       <a:schemeClr val="lt1"/>
     </dgm:fillClrLst>
-    <dgm:linClrLst>
+    <dgm:linClrLst meth="repeat">
       <a:schemeClr val="accent2"/>
-      <a:schemeClr val="accent3"/>
     </dgm:linClrLst>
     <dgm:effectClrLst/>
     <dgm:txLinClrLst/>
@@ -2357,9 +2339,8 @@
     <dgm:fillClrLst meth="repeat">
       <a:schemeClr val="lt1"/>
     </dgm:fillClrLst>
-    <dgm:linClrLst>
+    <dgm:linClrLst meth="repeat">
       <a:schemeClr val="accent2"/>
-      <a:schemeClr val="accent3"/>
     </dgm:linClrLst>
     <dgm:effectClrLst/>
     <dgm:txLinClrLst/>
@@ -2369,24 +2350,16 @@
     <dgm:txEffectClrLst/>
   </dgm:styleLbl>
   <dgm:styleLbl name="fgAccFollowNode1">
-    <dgm:fillClrLst>
+    <dgm:fillClrLst meth="repeat">
       <a:schemeClr val="accent2">
+        <a:alpha val="90000"/>
         <a:tint val="40000"/>
-        <a:alpha val="90000"/>
-      </a:schemeClr>
-      <a:schemeClr val="accent3">
-        <a:tint val="40000"/>
-        <a:alpha val="90000"/>
       </a:schemeClr>
     </dgm:fillClrLst>
-    <dgm:linClrLst>
+    <dgm:linClrLst meth="repeat">
       <a:schemeClr val="accent2">
+        <a:alpha val="90000"/>
         <a:tint val="40000"/>
-        <a:alpha val="90000"/>
-      </a:schemeClr>
-      <a:schemeClr val="accent3">
-        <a:tint val="40000"/>
-        <a:alpha val="90000"/>
       </a:schemeClr>
     </dgm:linClrLst>
     <dgm:effectClrLst/>
@@ -2397,24 +2370,16 @@
     <dgm:txEffectClrLst/>
   </dgm:styleLbl>
   <dgm:styleLbl name="alignAccFollowNode1">
-    <dgm:fillClrLst>
+    <dgm:fillClrLst meth="repeat">
       <a:schemeClr val="accent2">
+        <a:alpha val="90000"/>
         <a:tint val="40000"/>
-        <a:alpha val="90000"/>
-      </a:schemeClr>
-      <a:schemeClr val="accent3">
-        <a:tint val="40000"/>
-        <a:alpha val="90000"/>
       </a:schemeClr>
     </dgm:fillClrLst>
-    <dgm:linClrLst>
+    <dgm:linClrLst meth="repeat">
       <a:schemeClr val="accent2">
+        <a:alpha val="90000"/>
         <a:tint val="40000"/>
-        <a:alpha val="90000"/>
-      </a:schemeClr>
-      <a:schemeClr val="accent3">
-        <a:tint val="40000"/>
-        <a:alpha val="90000"/>
       </a:schemeClr>
     </dgm:linClrLst>
     <dgm:effectClrLst/>
@@ -2425,24 +2390,16 @@
     <dgm:txEffectClrLst/>
   </dgm:styleLbl>
   <dgm:styleLbl name="bgAccFollowNode1">
-    <dgm:fillClrLst>
+    <dgm:fillClrLst meth="repeat">
       <a:schemeClr val="accent2">
+        <a:alpha val="90000"/>
         <a:tint val="40000"/>
-        <a:alpha val="90000"/>
-      </a:schemeClr>
-      <a:schemeClr val="accent3">
-        <a:tint val="40000"/>
-        <a:alpha val="90000"/>
       </a:schemeClr>
     </dgm:fillClrLst>
-    <dgm:linClrLst>
+    <dgm:linClrLst meth="repeat">
       <a:schemeClr val="accent2">
+        <a:alpha val="90000"/>
         <a:tint val="40000"/>
-        <a:alpha val="90000"/>
-      </a:schemeClr>
-      <a:schemeClr val="accent3">
-        <a:tint val="40000"/>
-        <a:alpha val="90000"/>
       </a:schemeClr>
     </dgm:linClrLst>
     <dgm:effectClrLst/>
@@ -2458,8 +2415,8 @@
         <a:alpha val="90000"/>
       </a:schemeClr>
     </dgm:fillClrLst>
-    <dgm:linClrLst>
-      <a:schemeClr val="accent1"/>
+    <dgm:linClrLst meth="repeat">
+      <a:schemeClr val="accent2"/>
     </dgm:linClrLst>
     <dgm:effectClrLst/>
     <dgm:txLinClrLst/>
@@ -2474,8 +2431,8 @@
         <a:alpha val="90000"/>
       </a:schemeClr>
     </dgm:fillClrLst>
-    <dgm:linClrLst>
-      <a:schemeClr val="accent3"/>
+    <dgm:linClrLst meth="repeat">
+      <a:schemeClr val="accent2"/>
     </dgm:linClrLst>
     <dgm:effectClrLst/>
     <dgm:txLinClrLst/>
@@ -2490,8 +2447,8 @@
         <a:alpha val="90000"/>
       </a:schemeClr>
     </dgm:fillClrLst>
-    <dgm:linClrLst>
-      <a:schemeClr val="accent4"/>
+    <dgm:linClrLst meth="repeat">
+      <a:schemeClr val="accent2"/>
     </dgm:linClrLst>
     <dgm:effectClrLst/>
     <dgm:txLinClrLst/>
@@ -2506,8 +2463,8 @@
         <a:alpha val="90000"/>
       </a:schemeClr>
     </dgm:fillClrLst>
-    <dgm:linClrLst>
-      <a:schemeClr val="accent5"/>
+    <dgm:linClrLst meth="repeat">
+      <a:schemeClr val="accent2"/>
     </dgm:linClrLst>
     <dgm:effectClrLst/>
     <dgm:txLinClrLst/>
@@ -2523,7 +2480,7 @@
       </a:schemeClr>
     </dgm:fillClrLst>
     <dgm:linClrLst meth="repeat">
-      <a:schemeClr val="dk1"/>
+      <a:schemeClr val="accent2"/>
     </dgm:linClrLst>
     <dgm:effectClrLst/>
     <dgm:txLinClrLst/>
@@ -2535,11 +2492,11 @@
   <dgm:styleLbl name="dkBgShp">
     <dgm:fillClrLst meth="repeat">
       <a:schemeClr val="accent2">
-        <a:shade val="90000"/>
+        <a:shade val="80000"/>
       </a:schemeClr>
     </dgm:fillClrLst>
     <dgm:linClrLst meth="repeat">
-      <a:schemeClr val="dk1"/>
+      <a:schemeClr val="accent2"/>
     </dgm:linClrLst>
     <dgm:effectClrLst/>
     <dgm:txLinClrLst/>
@@ -2568,7 +2525,7 @@
   <dgm:styleLbl name="fgShp">
     <dgm:fillClrLst meth="repeat">
       <a:schemeClr val="accent2">
-        <a:tint val="40000"/>
+        <a:tint val="60000"/>
       </a:schemeClr>
     </dgm:fillClrLst>
     <dgm:linClrLst meth="repeat">
@@ -4539,7 +4496,7 @@
 <dgm:dataModel xmlns:dgm="http://schemas.openxmlformats.org/drawingml/2006/diagram" xmlns:a="http://schemas.openxmlformats.org/drawingml/2006/main">
   <dgm:ptLst>
     <dgm:pt modelId="{6408B9EC-A41F-4928-9CB8-CB32CD1B4FC0}" type="doc">
-      <dgm:prSet loTypeId="urn:microsoft.com/office/officeart/2005/8/layout/vProcess5" loCatId="process" qsTypeId="urn:microsoft.com/office/officeart/2005/8/quickstyle/simple1" qsCatId="simple" csTypeId="urn:microsoft.com/office/officeart/2005/8/colors/colorful2" csCatId="colorful"/>
+      <dgm:prSet loTypeId="urn:microsoft.com/office/officeart/2005/8/layout/vList2" loCatId="list" qsTypeId="urn:microsoft.com/office/officeart/2005/8/quickstyle/simple1" qsCatId="simple" csTypeId="urn:microsoft.com/office/officeart/2005/8/colors/accent2_2" csCatId="accent2"/>
       <dgm:spPr/>
       <dgm:t>
         <a:bodyPr/>
@@ -4697,105 +4654,58 @@
         </a:p>
       </dgm:t>
     </dgm:pt>
-    <dgm:pt modelId="{6B0435CA-63B5-465D-8880-7FFF8F76EB8E}" type="pres">
-      <dgm:prSet presAssocID="{6408B9EC-A41F-4928-9CB8-CB32CD1B4FC0}" presName="outerComposite" presStyleCnt="0">
+    <dgm:pt modelId="{40819073-A8C6-40BD-9096-047AD941E35D}" type="pres">
+      <dgm:prSet presAssocID="{6408B9EC-A41F-4928-9CB8-CB32CD1B4FC0}" presName="linear" presStyleCnt="0">
         <dgm:presLayoutVars>
-          <dgm:chMax val="5"/>
-          <dgm:dir/>
+          <dgm:animLvl val="lvl"/>
           <dgm:resizeHandles val="exact"/>
         </dgm:presLayoutVars>
       </dgm:prSet>
       <dgm:spPr/>
     </dgm:pt>
-    <dgm:pt modelId="{A7E88EC7-59DC-48C8-AC01-F0EC614B2B03}" type="pres">
-      <dgm:prSet presAssocID="{6408B9EC-A41F-4928-9CB8-CB32CD1B4FC0}" presName="dummyMaxCanvas" presStyleCnt="0">
-        <dgm:presLayoutVars/>
-      </dgm:prSet>
-      <dgm:spPr/>
-    </dgm:pt>
-    <dgm:pt modelId="{EDB8381E-B356-4A48-9EA2-5250454D31F7}" type="pres">
-      <dgm:prSet presAssocID="{6408B9EC-A41F-4928-9CB8-CB32CD1B4FC0}" presName="FourNodes_1" presStyleLbl="node1" presStyleIdx="0" presStyleCnt="4">
+    <dgm:pt modelId="{A63688E7-73B0-4838-8845-86ADC87D242D}" type="pres">
+      <dgm:prSet presAssocID="{0A566128-3C01-4866-B3EB-0BBA56D84EF7}" presName="parentText" presStyleLbl="node1" presStyleIdx="0" presStyleCnt="4">
         <dgm:presLayoutVars>
+          <dgm:chMax val="0"/>
           <dgm:bulletEnabled val="1"/>
         </dgm:presLayoutVars>
       </dgm:prSet>
       <dgm:spPr/>
     </dgm:pt>
-    <dgm:pt modelId="{F2348AAA-F9D4-4F1D-826B-2142BA964DC7}" type="pres">
-      <dgm:prSet presAssocID="{6408B9EC-A41F-4928-9CB8-CB32CD1B4FC0}" presName="FourNodes_2" presStyleLbl="node1" presStyleIdx="1" presStyleCnt="4">
+    <dgm:pt modelId="{DA11C551-1F15-484A-8EE3-2D0C9C833D4B}" type="pres">
+      <dgm:prSet presAssocID="{5BFFCEF0-E02B-4AD0-9956-3AEEBA491D53}" presName="spacer" presStyleCnt="0"/>
+      <dgm:spPr/>
+    </dgm:pt>
+    <dgm:pt modelId="{3EC126A3-EF50-4DDD-977A-3207E9012772}" type="pres">
+      <dgm:prSet presAssocID="{441670C1-5A93-4D34-B532-86FD44B232A6}" presName="parentText" presStyleLbl="node1" presStyleIdx="1" presStyleCnt="4">
         <dgm:presLayoutVars>
+          <dgm:chMax val="0"/>
           <dgm:bulletEnabled val="1"/>
         </dgm:presLayoutVars>
       </dgm:prSet>
       <dgm:spPr/>
     </dgm:pt>
-    <dgm:pt modelId="{9D53991B-1C96-4B49-B317-8DC08390AB9A}" type="pres">
-      <dgm:prSet presAssocID="{6408B9EC-A41F-4928-9CB8-CB32CD1B4FC0}" presName="FourNodes_3" presStyleLbl="node1" presStyleIdx="2" presStyleCnt="4">
+    <dgm:pt modelId="{14E7B6D1-F8D1-45F1-81D8-25E9106DEE59}" type="pres">
+      <dgm:prSet presAssocID="{84EF6A4F-7B5C-4071-94D1-5D440F6DD7F8}" presName="spacer" presStyleCnt="0"/>
+      <dgm:spPr/>
+    </dgm:pt>
+    <dgm:pt modelId="{3E9E94FD-13EA-467F-9A8A-08DB469C8891}" type="pres">
+      <dgm:prSet presAssocID="{D947DAA9-2852-4915-A996-93D4AB3FC1F7}" presName="parentText" presStyleLbl="node1" presStyleIdx="2" presStyleCnt="4">
         <dgm:presLayoutVars>
+          <dgm:chMax val="0"/>
           <dgm:bulletEnabled val="1"/>
         </dgm:presLayoutVars>
       </dgm:prSet>
       <dgm:spPr/>
     </dgm:pt>
-    <dgm:pt modelId="{B38EF7F0-0E0A-46D0-9C38-37232C08ABC6}" type="pres">
-      <dgm:prSet presAssocID="{6408B9EC-A41F-4928-9CB8-CB32CD1B4FC0}" presName="FourNodes_4" presStyleLbl="node1" presStyleIdx="3" presStyleCnt="4">
-        <dgm:presLayoutVars>
-          <dgm:bulletEnabled val="1"/>
-        </dgm:presLayoutVars>
-      </dgm:prSet>
+    <dgm:pt modelId="{B95B6B12-9A99-4078-89CF-D2C194876A67}" type="pres">
+      <dgm:prSet presAssocID="{56720B10-3E08-490C-97EF-373419998CF9}" presName="spacer" presStyleCnt="0"/>
       <dgm:spPr/>
     </dgm:pt>
-    <dgm:pt modelId="{728BC353-69C1-49A9-81AE-82C5DB393996}" type="pres">
-      <dgm:prSet presAssocID="{6408B9EC-A41F-4928-9CB8-CB32CD1B4FC0}" presName="FourConn_1-2" presStyleLbl="fgAccFollowNode1" presStyleIdx="0" presStyleCnt="3">
+    <dgm:pt modelId="{27BB5F57-E096-4818-93D3-279535AA72FA}" type="pres">
+      <dgm:prSet presAssocID="{1FB10438-009F-4674-B403-08A2B7516C2A}" presName="parentText" presStyleLbl="node1" presStyleIdx="3" presStyleCnt="4">
         <dgm:presLayoutVars>
-          <dgm:bulletEnabled val="1"/>
-        </dgm:presLayoutVars>
-      </dgm:prSet>
-      <dgm:spPr/>
-    </dgm:pt>
-    <dgm:pt modelId="{DCC81BAF-6E49-4D61-A8C9-35D2BD2314EC}" type="pres">
-      <dgm:prSet presAssocID="{6408B9EC-A41F-4928-9CB8-CB32CD1B4FC0}" presName="FourConn_2-3" presStyleLbl="fgAccFollowNode1" presStyleIdx="1" presStyleCnt="3">
-        <dgm:presLayoutVars>
-          <dgm:bulletEnabled val="1"/>
-        </dgm:presLayoutVars>
-      </dgm:prSet>
-      <dgm:spPr/>
-    </dgm:pt>
-    <dgm:pt modelId="{07930A7A-7AD4-4AC3-8910-DAA16B8A4EFC}" type="pres">
-      <dgm:prSet presAssocID="{6408B9EC-A41F-4928-9CB8-CB32CD1B4FC0}" presName="FourConn_3-4" presStyleLbl="fgAccFollowNode1" presStyleIdx="2" presStyleCnt="3">
-        <dgm:presLayoutVars>
-          <dgm:bulletEnabled val="1"/>
-        </dgm:presLayoutVars>
-      </dgm:prSet>
-      <dgm:spPr/>
-    </dgm:pt>
-    <dgm:pt modelId="{FFF53301-6D2A-4BC4-9F37-C4189333D578}" type="pres">
-      <dgm:prSet presAssocID="{6408B9EC-A41F-4928-9CB8-CB32CD1B4FC0}" presName="FourNodes_1_text" presStyleLbl="node1" presStyleIdx="3" presStyleCnt="4">
-        <dgm:presLayoutVars>
-          <dgm:bulletEnabled val="1"/>
-        </dgm:presLayoutVars>
-      </dgm:prSet>
-      <dgm:spPr/>
-    </dgm:pt>
-    <dgm:pt modelId="{649B4AB1-40EC-4373-ABC2-6188BBD24F3D}" type="pres">
-      <dgm:prSet presAssocID="{6408B9EC-A41F-4928-9CB8-CB32CD1B4FC0}" presName="FourNodes_2_text" presStyleLbl="node1" presStyleIdx="3" presStyleCnt="4">
-        <dgm:presLayoutVars>
-          <dgm:bulletEnabled val="1"/>
-        </dgm:presLayoutVars>
-      </dgm:prSet>
-      <dgm:spPr/>
-    </dgm:pt>
-    <dgm:pt modelId="{8347E8D0-9856-4BEF-B013-E464B3A4E676}" type="pres">
-      <dgm:prSet presAssocID="{6408B9EC-A41F-4928-9CB8-CB32CD1B4FC0}" presName="FourNodes_3_text" presStyleLbl="node1" presStyleIdx="3" presStyleCnt="4">
-        <dgm:presLayoutVars>
-          <dgm:bulletEnabled val="1"/>
-        </dgm:presLayoutVars>
-      </dgm:prSet>
-      <dgm:spPr/>
-    </dgm:pt>
-    <dgm:pt modelId="{42D7410C-A30B-4227-BC91-A8D71FB27E28}" type="pres">
-      <dgm:prSet presAssocID="{6408B9EC-A41F-4928-9CB8-CB32CD1B4FC0}" presName="FourNodes_4_text" presStyleLbl="node1" presStyleIdx="3" presStyleCnt="4">
-        <dgm:presLayoutVars>
+          <dgm:chMax val="0"/>
           <dgm:bulletEnabled val="1"/>
         </dgm:presLayoutVars>
       </dgm:prSet>
@@ -4804,39 +4714,27 @@
   </dgm:ptLst>
   <dgm:cxnLst>
     <dgm:cxn modelId="{61FBC501-82CB-4588-9BEF-80E2142ED949}" srcId="{6408B9EC-A41F-4928-9CB8-CB32CD1B4FC0}" destId="{0A566128-3C01-4866-B3EB-0BBA56D84EF7}" srcOrd="0" destOrd="0" parTransId="{5D984A85-2589-4078-9A46-43F63F5BD5C2}" sibTransId="{5BFFCEF0-E02B-4AD0-9956-3AEEBA491D53}"/>
-    <dgm:cxn modelId="{C788DA5C-BA5D-4054-9FBE-79214FCEADB7}" type="presOf" srcId="{5BFFCEF0-E02B-4AD0-9956-3AEEBA491D53}" destId="{728BC353-69C1-49A9-81AE-82C5DB393996}" srcOrd="0" destOrd="0" presId="urn:microsoft.com/office/officeart/2005/8/layout/vProcess5"/>
+    <dgm:cxn modelId="{21A81602-077F-4B7A-94B9-44BFF0EAC81A}" type="presOf" srcId="{6408B9EC-A41F-4928-9CB8-CB32CD1B4FC0}" destId="{40819073-A8C6-40BD-9096-047AD941E35D}" srcOrd="0" destOrd="0" presId="urn:microsoft.com/office/officeart/2005/8/layout/vList2"/>
+    <dgm:cxn modelId="{F0A01319-CBD3-4E3C-8FA3-3DA750593557}" type="presOf" srcId="{1FB10438-009F-4674-B403-08A2B7516C2A}" destId="{27BB5F57-E096-4818-93D3-279535AA72FA}" srcOrd="0" destOrd="0" presId="urn:microsoft.com/office/officeart/2005/8/layout/vList2"/>
+    <dgm:cxn modelId="{5F887019-8D83-42E7-A989-2168FC78349E}" type="presOf" srcId="{D947DAA9-2852-4915-A996-93D4AB3FC1F7}" destId="{3E9E94FD-13EA-467F-9A8A-08DB469C8891}" srcOrd="0" destOrd="0" presId="urn:microsoft.com/office/officeart/2005/8/layout/vList2"/>
+    <dgm:cxn modelId="{88351220-0C9D-475A-A599-7252C53457A9}" type="presOf" srcId="{0A566128-3C01-4866-B3EB-0BBA56D84EF7}" destId="{A63688E7-73B0-4838-8845-86ADC87D242D}" srcOrd="0" destOrd="0" presId="urn:microsoft.com/office/officeart/2005/8/layout/vList2"/>
     <dgm:cxn modelId="{0BF9A041-7F76-4496-9217-F6081501F783}" srcId="{6408B9EC-A41F-4928-9CB8-CB32CD1B4FC0}" destId="{D947DAA9-2852-4915-A996-93D4AB3FC1F7}" srcOrd="2" destOrd="0" parTransId="{23DD3708-E736-4C41-B06E-1DA02433CC1B}" sibTransId="{56720B10-3E08-490C-97EF-373419998CF9}"/>
-    <dgm:cxn modelId="{930DC94F-289C-45F5-9CF4-13C5907B0A83}" type="presOf" srcId="{0A566128-3C01-4866-B3EB-0BBA56D84EF7}" destId="{EDB8381E-B356-4A48-9EA2-5250454D31F7}" srcOrd="0" destOrd="0" presId="urn:microsoft.com/office/officeart/2005/8/layout/vProcess5"/>
-    <dgm:cxn modelId="{244F1778-6F73-4F76-9713-0F1813138BB8}" type="presOf" srcId="{441670C1-5A93-4D34-B532-86FD44B232A6}" destId="{649B4AB1-40EC-4373-ABC2-6188BBD24F3D}" srcOrd="1" destOrd="0" presId="urn:microsoft.com/office/officeart/2005/8/layout/vProcess5"/>
+    <dgm:cxn modelId="{3449A469-A66B-4821-8DFF-A9602B635F53}" type="presOf" srcId="{441670C1-5A93-4D34-B532-86FD44B232A6}" destId="{3EC126A3-EF50-4DDD-977A-3207E9012772}" srcOrd="0" destOrd="0" presId="urn:microsoft.com/office/officeart/2005/8/layout/vList2"/>
     <dgm:cxn modelId="{2D5DD77A-A8F0-4882-9C6E-78DC178020CA}" srcId="{6408B9EC-A41F-4928-9CB8-CB32CD1B4FC0}" destId="{441670C1-5A93-4D34-B532-86FD44B232A6}" srcOrd="1" destOrd="0" parTransId="{294F859A-6AED-4DC2-9A6B-E901034F000D}" sibTransId="{84EF6A4F-7B5C-4071-94D1-5D440F6DD7F8}"/>
-    <dgm:cxn modelId="{2584297D-06D9-4F25-8EEB-77E9A77234AC}" type="presOf" srcId="{441670C1-5A93-4D34-B532-86FD44B232A6}" destId="{F2348AAA-F9D4-4F1D-826B-2142BA964DC7}" srcOrd="0" destOrd="0" presId="urn:microsoft.com/office/officeart/2005/8/layout/vProcess5"/>
-    <dgm:cxn modelId="{0F244B90-A592-451F-8534-F292F2A0D4D0}" type="presOf" srcId="{D947DAA9-2852-4915-A996-93D4AB3FC1F7}" destId="{8347E8D0-9856-4BEF-B013-E464B3A4E676}" srcOrd="1" destOrd="0" presId="urn:microsoft.com/office/officeart/2005/8/layout/vProcess5"/>
-    <dgm:cxn modelId="{EE060C94-421D-4D17-8594-C42805241C09}" type="presOf" srcId="{6408B9EC-A41F-4928-9CB8-CB32CD1B4FC0}" destId="{6B0435CA-63B5-465D-8880-7FFF8F76EB8E}" srcOrd="0" destOrd="0" presId="urn:microsoft.com/office/officeart/2005/8/layout/vProcess5"/>
     <dgm:cxn modelId="{770FC59E-2954-49AC-9E0B-9C71F9DAB670}" srcId="{6408B9EC-A41F-4928-9CB8-CB32CD1B4FC0}" destId="{1FB10438-009F-4674-B403-08A2B7516C2A}" srcOrd="3" destOrd="0" parTransId="{6377D7B1-EC98-4DF4-A352-5F012AA4E716}" sibTransId="{128201EF-1B01-4C6D-AEEA-8BC91E8B38BD}"/>
-    <dgm:cxn modelId="{C55488A0-C882-4B28-83D8-7804CC0A9331}" type="presOf" srcId="{0A566128-3C01-4866-B3EB-0BBA56D84EF7}" destId="{FFF53301-6D2A-4BC4-9F37-C4189333D578}" srcOrd="1" destOrd="0" presId="urn:microsoft.com/office/officeart/2005/8/layout/vProcess5"/>
-    <dgm:cxn modelId="{1B80FBA4-45A3-4FD2-930A-84A4EFADA489}" type="presOf" srcId="{1FB10438-009F-4674-B403-08A2B7516C2A}" destId="{42D7410C-A30B-4227-BC91-A8D71FB27E28}" srcOrd="1" destOrd="0" presId="urn:microsoft.com/office/officeart/2005/8/layout/vProcess5"/>
-    <dgm:cxn modelId="{BDCE3DB4-0438-4434-9D74-B3F49EBAC889}" type="presOf" srcId="{56720B10-3E08-490C-97EF-373419998CF9}" destId="{07930A7A-7AD4-4AC3-8910-DAA16B8A4EFC}" srcOrd="0" destOrd="0" presId="urn:microsoft.com/office/officeart/2005/8/layout/vProcess5"/>
-    <dgm:cxn modelId="{791D8DB8-AE11-4F49-BC25-8C51E95E2A72}" type="presOf" srcId="{D947DAA9-2852-4915-A996-93D4AB3FC1F7}" destId="{9D53991B-1C96-4B49-B317-8DC08390AB9A}" srcOrd="0" destOrd="0" presId="urn:microsoft.com/office/officeart/2005/8/layout/vProcess5"/>
-    <dgm:cxn modelId="{FD789FC4-58E6-45C6-B7CB-9267126A000C}" type="presOf" srcId="{84EF6A4F-7B5C-4071-94D1-5D440F6DD7F8}" destId="{DCC81BAF-6E49-4D61-A8C9-35D2BD2314EC}" srcOrd="0" destOrd="0" presId="urn:microsoft.com/office/officeart/2005/8/layout/vProcess5"/>
-    <dgm:cxn modelId="{76E2EBFC-1404-43C4-831E-B68AF440807E}" type="presOf" srcId="{1FB10438-009F-4674-B403-08A2B7516C2A}" destId="{B38EF7F0-0E0A-46D0-9C38-37232C08ABC6}" srcOrd="0" destOrd="0" presId="urn:microsoft.com/office/officeart/2005/8/layout/vProcess5"/>
-    <dgm:cxn modelId="{AED51880-1D49-4815-8A4D-285097140605}" type="presParOf" srcId="{6B0435CA-63B5-465D-8880-7FFF8F76EB8E}" destId="{A7E88EC7-59DC-48C8-AC01-F0EC614B2B03}" srcOrd="0" destOrd="0" presId="urn:microsoft.com/office/officeart/2005/8/layout/vProcess5"/>
-    <dgm:cxn modelId="{3A693E19-063D-441C-BD22-8B14486C4BB9}" type="presParOf" srcId="{6B0435CA-63B5-465D-8880-7FFF8F76EB8E}" destId="{EDB8381E-B356-4A48-9EA2-5250454D31F7}" srcOrd="1" destOrd="0" presId="urn:microsoft.com/office/officeart/2005/8/layout/vProcess5"/>
-    <dgm:cxn modelId="{79A31DE6-E58A-421F-B519-AB6B9F6DCE85}" type="presParOf" srcId="{6B0435CA-63B5-465D-8880-7FFF8F76EB8E}" destId="{F2348AAA-F9D4-4F1D-826B-2142BA964DC7}" srcOrd="2" destOrd="0" presId="urn:microsoft.com/office/officeart/2005/8/layout/vProcess5"/>
-    <dgm:cxn modelId="{C7814B30-61F1-46CF-B554-8CD99495F19C}" type="presParOf" srcId="{6B0435CA-63B5-465D-8880-7FFF8F76EB8E}" destId="{9D53991B-1C96-4B49-B317-8DC08390AB9A}" srcOrd="3" destOrd="0" presId="urn:microsoft.com/office/officeart/2005/8/layout/vProcess5"/>
-    <dgm:cxn modelId="{25C929A7-A333-473D-B9F2-AB527B05F5AB}" type="presParOf" srcId="{6B0435CA-63B5-465D-8880-7FFF8F76EB8E}" destId="{B38EF7F0-0E0A-46D0-9C38-37232C08ABC6}" srcOrd="4" destOrd="0" presId="urn:microsoft.com/office/officeart/2005/8/layout/vProcess5"/>
-    <dgm:cxn modelId="{DC08067A-FCB0-421B-8024-29026705116C}" type="presParOf" srcId="{6B0435CA-63B5-465D-8880-7FFF8F76EB8E}" destId="{728BC353-69C1-49A9-81AE-82C5DB393996}" srcOrd="5" destOrd="0" presId="urn:microsoft.com/office/officeart/2005/8/layout/vProcess5"/>
-    <dgm:cxn modelId="{64503513-C169-4F9A-831C-1D1A25DC2287}" type="presParOf" srcId="{6B0435CA-63B5-465D-8880-7FFF8F76EB8E}" destId="{DCC81BAF-6E49-4D61-A8C9-35D2BD2314EC}" srcOrd="6" destOrd="0" presId="urn:microsoft.com/office/officeart/2005/8/layout/vProcess5"/>
-    <dgm:cxn modelId="{148381E6-3642-4D79-92BB-0C2D0C571B01}" type="presParOf" srcId="{6B0435CA-63B5-465D-8880-7FFF8F76EB8E}" destId="{07930A7A-7AD4-4AC3-8910-DAA16B8A4EFC}" srcOrd="7" destOrd="0" presId="urn:microsoft.com/office/officeart/2005/8/layout/vProcess5"/>
-    <dgm:cxn modelId="{74EAB0D7-9CB3-4B00-8D49-00E3A3E50F0B}" type="presParOf" srcId="{6B0435CA-63B5-465D-8880-7FFF8F76EB8E}" destId="{FFF53301-6D2A-4BC4-9F37-C4189333D578}" srcOrd="8" destOrd="0" presId="urn:microsoft.com/office/officeart/2005/8/layout/vProcess5"/>
-    <dgm:cxn modelId="{19CAF5D8-2A7A-458A-96A4-5CD3D81BC830}" type="presParOf" srcId="{6B0435CA-63B5-465D-8880-7FFF8F76EB8E}" destId="{649B4AB1-40EC-4373-ABC2-6188BBD24F3D}" srcOrd="9" destOrd="0" presId="urn:microsoft.com/office/officeart/2005/8/layout/vProcess5"/>
-    <dgm:cxn modelId="{FE2ED64B-A521-42B6-8173-2FD452D9EEB0}" type="presParOf" srcId="{6B0435CA-63B5-465D-8880-7FFF8F76EB8E}" destId="{8347E8D0-9856-4BEF-B013-E464B3A4E676}" srcOrd="10" destOrd="0" presId="urn:microsoft.com/office/officeart/2005/8/layout/vProcess5"/>
-    <dgm:cxn modelId="{43ABE154-4C26-4B11-8D69-3CC496E93FBA}" type="presParOf" srcId="{6B0435CA-63B5-465D-8880-7FFF8F76EB8E}" destId="{42D7410C-A30B-4227-BC91-A8D71FB27E28}" srcOrd="11" destOrd="0" presId="urn:microsoft.com/office/officeart/2005/8/layout/vProcess5"/>
+    <dgm:cxn modelId="{2B5663CD-85D2-4341-A3F6-22013F7F7197}" type="presParOf" srcId="{40819073-A8C6-40BD-9096-047AD941E35D}" destId="{A63688E7-73B0-4838-8845-86ADC87D242D}" srcOrd="0" destOrd="0" presId="urn:microsoft.com/office/officeart/2005/8/layout/vList2"/>
+    <dgm:cxn modelId="{F857765E-83B6-4ABF-BE17-2094C14D5107}" type="presParOf" srcId="{40819073-A8C6-40BD-9096-047AD941E35D}" destId="{DA11C551-1F15-484A-8EE3-2D0C9C833D4B}" srcOrd="1" destOrd="0" presId="urn:microsoft.com/office/officeart/2005/8/layout/vList2"/>
+    <dgm:cxn modelId="{1CA8C0EE-7E72-4DE1-A8B7-F4C200CB91E8}" type="presParOf" srcId="{40819073-A8C6-40BD-9096-047AD941E35D}" destId="{3EC126A3-EF50-4DDD-977A-3207E9012772}" srcOrd="2" destOrd="0" presId="urn:microsoft.com/office/officeart/2005/8/layout/vList2"/>
+    <dgm:cxn modelId="{EABB46B8-7F5A-4544-9082-E365CBC7C6C1}" type="presParOf" srcId="{40819073-A8C6-40BD-9096-047AD941E35D}" destId="{14E7B6D1-F8D1-45F1-81D8-25E9106DEE59}" srcOrd="3" destOrd="0" presId="urn:microsoft.com/office/officeart/2005/8/layout/vList2"/>
+    <dgm:cxn modelId="{7D5627D6-08AD-4E66-B726-5872AE64FF2C}" type="presParOf" srcId="{40819073-A8C6-40BD-9096-047AD941E35D}" destId="{3E9E94FD-13EA-467F-9A8A-08DB469C8891}" srcOrd="4" destOrd="0" presId="urn:microsoft.com/office/officeart/2005/8/layout/vList2"/>
+    <dgm:cxn modelId="{185FE34D-4EE5-42D9-AC3D-1B80EEC5E6EB}" type="presParOf" srcId="{40819073-A8C6-40BD-9096-047AD941E35D}" destId="{B95B6B12-9A99-4078-89CF-D2C194876A67}" srcOrd="5" destOrd="0" presId="urn:microsoft.com/office/officeart/2005/8/layout/vList2"/>
+    <dgm:cxn modelId="{D478F86A-D873-4E33-95B9-61CB65731AFC}" type="presParOf" srcId="{40819073-A8C6-40BD-9096-047AD941E35D}" destId="{27BB5F57-E096-4818-93D3-279535AA72FA}" srcOrd="6" destOrd="0" presId="urn:microsoft.com/office/officeart/2005/8/layout/vList2"/>
   </dgm:cxnLst>
   <dgm:bg/>
   <dgm:whole/>
   <dgm:extLst>
     <a:ext uri="http://schemas.microsoft.com/office/drawing/2008/diagram">
-      <dsp:dataModelExt xmlns:dsp="http://schemas.microsoft.com/office/drawing/2008/diagram" relId="rId7" minVer="http://schemas.openxmlformats.org/drawingml/2006/diagram"/>
+      <dsp:dataModelExt xmlns:dsp="http://schemas.microsoft.com/office/drawing/2008/diagram" relId="rId8" minVer="http://schemas.openxmlformats.org/drawingml/2006/diagram"/>
     </a:ext>
   </dgm:extLst>
 </dgm:dataModel>
@@ -6068,20 +5966,18 @@
       <dsp:cNvGrpSpPr/>
     </dsp:nvGrpSpPr>
     <dsp:grpSpPr/>
-    <dsp:sp modelId="{EDB8381E-B356-4A48-9EA2-5250454D31F7}">
+    <dsp:sp modelId="{A63688E7-73B0-4838-8845-86ADC87D242D}">
       <dsp:nvSpPr>
         <dsp:cNvPr id="0" name=""/>
         <dsp:cNvSpPr/>
       </dsp:nvSpPr>
       <dsp:spPr>
         <a:xfrm>
-          <a:off x="0" y="0"/>
-          <a:ext cx="8046720" cy="832937"/>
+          <a:off x="0" y="77653"/>
+          <a:ext cx="3448259" cy="755820"/>
         </a:xfrm>
         <a:prstGeom prst="roundRect">
-          <a:avLst>
-            <a:gd name="adj" fmla="val 10000"/>
-          </a:avLst>
+          <a:avLst/>
         </a:prstGeom>
         <a:solidFill>
           <a:schemeClr val="accent2">
@@ -6119,12 +6015,12 @@
         </a:fontRef>
       </dsp:style>
       <dsp:txBody>
-        <a:bodyPr spcFirstLastPara="0" vert="horz" wrap="square" lIns="99060" tIns="99060" rIns="99060" bIns="99060" numCol="1" spcCol="1270" anchor="ctr" anchorCtr="0">
+        <a:bodyPr spcFirstLastPara="0" vert="horz" wrap="square" lIns="72390" tIns="72390" rIns="72390" bIns="72390" numCol="1" spcCol="1270" anchor="ctr" anchorCtr="0">
           <a:noAutofit/>
         </a:bodyPr>
         <a:lstStyle/>
         <a:p>
-          <a:pPr marL="0" lvl="0" indent="0" algn="l" defTabSz="1155700">
+          <a:pPr marL="0" lvl="0" indent="0" algn="l" defTabSz="844550">
             <a:lnSpc>
               <a:spcPct val="90000"/>
             </a:lnSpc>
@@ -6137,37 +6033,35 @@
             <a:buNone/>
           </a:pPr>
           <a:r>
-            <a:rPr lang="en-IE" sz="2600" kern="1200"/>
+            <a:rPr lang="en-IE" sz="1900" kern="1200"/>
             <a:t>Perfect classification of the high-risk patients</a:t>
           </a:r>
-          <a:endParaRPr lang="en-US" sz="2600" kern="1200"/>
+          <a:endParaRPr lang="en-US" sz="1900" kern="1200"/>
         </a:p>
       </dsp:txBody>
       <dsp:txXfrm>
-        <a:off x="24396" y="24396"/>
-        <a:ext cx="7077531" cy="784145"/>
+        <a:off x="36896" y="114549"/>
+        <a:ext cx="3374467" cy="682028"/>
       </dsp:txXfrm>
     </dsp:sp>
-    <dsp:sp modelId="{F2348AAA-F9D4-4F1D-826B-2142BA964DC7}">
+    <dsp:sp modelId="{3EC126A3-EF50-4DDD-977A-3207E9012772}">
       <dsp:nvSpPr>
         <dsp:cNvPr id="0" name=""/>
         <dsp:cNvSpPr/>
       </dsp:nvSpPr>
       <dsp:spPr>
         <a:xfrm>
-          <a:off x="673912" y="984380"/>
-          <a:ext cx="8046720" cy="832937"/>
+          <a:off x="0" y="888193"/>
+          <a:ext cx="3448259" cy="755820"/>
         </a:xfrm>
         <a:prstGeom prst="roundRect">
-          <a:avLst>
-            <a:gd name="adj" fmla="val 10000"/>
-          </a:avLst>
+          <a:avLst/>
         </a:prstGeom>
         <a:solidFill>
           <a:schemeClr val="accent2">
-            <a:hueOff val="-443941"/>
-            <a:satOff val="-195"/>
-            <a:lumOff val="523"/>
+            <a:hueOff val="0"/>
+            <a:satOff val="0"/>
+            <a:lumOff val="0"/>
             <a:alphaOff val="0"/>
           </a:schemeClr>
         </a:solidFill>
@@ -6199,12 +6093,12 @@
         </a:fontRef>
       </dsp:style>
       <dsp:txBody>
-        <a:bodyPr spcFirstLastPara="0" vert="horz" wrap="square" lIns="99060" tIns="99060" rIns="99060" bIns="99060" numCol="1" spcCol="1270" anchor="ctr" anchorCtr="0">
+        <a:bodyPr spcFirstLastPara="0" vert="horz" wrap="square" lIns="72390" tIns="72390" rIns="72390" bIns="72390" numCol="1" spcCol="1270" anchor="ctr" anchorCtr="0">
           <a:noAutofit/>
         </a:bodyPr>
         <a:lstStyle/>
         <a:p>
-          <a:pPr marL="0" lvl="0" indent="0" algn="l" defTabSz="1155700">
+          <a:pPr marL="0" lvl="0" indent="0" algn="l" defTabSz="844550">
             <a:lnSpc>
               <a:spcPct val="90000"/>
             </a:lnSpc>
@@ -6217,37 +6111,35 @@
             <a:buNone/>
           </a:pPr>
           <a:r>
-            <a:rPr lang="en-IE" sz="2600" kern="1200"/>
+            <a:rPr lang="en-IE" sz="1900" kern="1200"/>
             <a:t>Minor errors in the medium-risk category</a:t>
           </a:r>
-          <a:endParaRPr lang="en-US" sz="2600" kern="1200"/>
+          <a:endParaRPr lang="en-US" sz="1900" kern="1200"/>
         </a:p>
       </dsp:txBody>
       <dsp:txXfrm>
-        <a:off x="698308" y="1008776"/>
-        <a:ext cx="6782605" cy="784145"/>
+        <a:off x="36896" y="925089"/>
+        <a:ext cx="3374467" cy="682028"/>
       </dsp:txXfrm>
     </dsp:sp>
-    <dsp:sp modelId="{9D53991B-1C96-4B49-B317-8DC08390AB9A}">
+    <dsp:sp modelId="{3E9E94FD-13EA-467F-9A8A-08DB469C8891}">
       <dsp:nvSpPr>
         <dsp:cNvPr id="0" name=""/>
         <dsp:cNvSpPr/>
       </dsp:nvSpPr>
       <dsp:spPr>
         <a:xfrm>
-          <a:off x="1337767" y="1968761"/>
-          <a:ext cx="8046720" cy="832937"/>
+          <a:off x="0" y="1698733"/>
+          <a:ext cx="3448259" cy="755820"/>
         </a:xfrm>
         <a:prstGeom prst="roundRect">
-          <a:avLst>
-            <a:gd name="adj" fmla="val 10000"/>
-          </a:avLst>
+          <a:avLst/>
         </a:prstGeom>
         <a:solidFill>
           <a:schemeClr val="accent2">
-            <a:hueOff val="-887883"/>
-            <a:satOff val="-391"/>
-            <a:lumOff val="1046"/>
+            <a:hueOff val="0"/>
+            <a:satOff val="0"/>
+            <a:lumOff val="0"/>
             <a:alphaOff val="0"/>
           </a:schemeClr>
         </a:solidFill>
@@ -6279,12 +6171,12 @@
         </a:fontRef>
       </dsp:style>
       <dsp:txBody>
-        <a:bodyPr spcFirstLastPara="0" vert="horz" wrap="square" lIns="99060" tIns="99060" rIns="99060" bIns="99060" numCol="1" spcCol="1270" anchor="ctr" anchorCtr="0">
+        <a:bodyPr spcFirstLastPara="0" vert="horz" wrap="square" lIns="72390" tIns="72390" rIns="72390" bIns="72390" numCol="1" spcCol="1270" anchor="ctr" anchorCtr="0">
           <a:noAutofit/>
         </a:bodyPr>
         <a:lstStyle/>
         <a:p>
-          <a:pPr marL="0" lvl="0" indent="0" algn="l" defTabSz="1155700">
+          <a:pPr marL="0" lvl="0" indent="0" algn="l" defTabSz="844550">
             <a:lnSpc>
               <a:spcPct val="90000"/>
             </a:lnSpc>
@@ -6297,37 +6189,35 @@
             <a:buNone/>
           </a:pPr>
           <a:r>
-            <a:rPr lang="en-IE" sz="2600" kern="1200"/>
+            <a:rPr lang="en-IE" sz="1900" kern="1200"/>
             <a:t>No low-risk samples in the test set</a:t>
           </a:r>
-          <a:endParaRPr lang="en-US" sz="2600" kern="1200"/>
+          <a:endParaRPr lang="en-US" sz="1900" kern="1200"/>
         </a:p>
       </dsp:txBody>
       <dsp:txXfrm>
-        <a:off x="1362163" y="1993157"/>
-        <a:ext cx="6792664" cy="784145"/>
+        <a:off x="36896" y="1735629"/>
+        <a:ext cx="3374467" cy="682028"/>
       </dsp:txXfrm>
     </dsp:sp>
-    <dsp:sp modelId="{B38EF7F0-0E0A-46D0-9C38-37232C08ABC6}">
+    <dsp:sp modelId="{27BB5F57-E096-4818-93D3-279535AA72FA}">
       <dsp:nvSpPr>
         <dsp:cNvPr id="0" name=""/>
         <dsp:cNvSpPr/>
       </dsp:nvSpPr>
       <dsp:spPr>
         <a:xfrm>
-          <a:off x="2011680" y="2953142"/>
-          <a:ext cx="8046720" cy="832937"/>
+          <a:off x="0" y="2509273"/>
+          <a:ext cx="3448259" cy="755820"/>
         </a:xfrm>
         <a:prstGeom prst="roundRect">
-          <a:avLst>
-            <a:gd name="adj" fmla="val 10000"/>
-          </a:avLst>
+          <a:avLst/>
         </a:prstGeom>
         <a:solidFill>
           <a:schemeClr val="accent2">
-            <a:hueOff val="-1331824"/>
-            <a:satOff val="-586"/>
-            <a:lumOff val="1569"/>
+            <a:hueOff val="0"/>
+            <a:satOff val="0"/>
+            <a:lumOff val="0"/>
             <a:alphaOff val="0"/>
           </a:schemeClr>
         </a:solidFill>
@@ -6359,12 +6249,12 @@
         </a:fontRef>
       </dsp:style>
       <dsp:txBody>
-        <a:bodyPr spcFirstLastPara="0" vert="horz" wrap="square" lIns="99060" tIns="99060" rIns="99060" bIns="99060" numCol="1" spcCol="1270" anchor="ctr" anchorCtr="0">
+        <a:bodyPr spcFirstLastPara="0" vert="horz" wrap="square" lIns="72390" tIns="72390" rIns="72390" bIns="72390" numCol="1" spcCol="1270" anchor="ctr" anchorCtr="0">
           <a:noAutofit/>
         </a:bodyPr>
         <a:lstStyle/>
         <a:p>
-          <a:pPr marL="0" lvl="0" indent="0" algn="l" defTabSz="1155700">
+          <a:pPr marL="0" lvl="0" indent="0" algn="l" defTabSz="844550">
             <a:lnSpc>
               <a:spcPct val="90000"/>
             </a:lnSpc>
@@ -6377,252 +6267,15 @@
             <a:buNone/>
           </a:pPr>
           <a:r>
-            <a:rPr lang="en-IE" sz="2600" kern="1200"/>
+            <a:rPr lang="en-IE" sz="1900" kern="1200"/>
             <a:t>Highlights the class imbalance</a:t>
           </a:r>
-          <a:endParaRPr lang="en-US" sz="2600" kern="1200"/>
+          <a:endParaRPr lang="en-US" sz="1900" kern="1200"/>
         </a:p>
       </dsp:txBody>
       <dsp:txXfrm>
-        <a:off x="2036076" y="2977538"/>
-        <a:ext cx="6782605" cy="784145"/>
-      </dsp:txXfrm>
-    </dsp:sp>
-    <dsp:sp modelId="{728BC353-69C1-49A9-81AE-82C5DB393996}">
-      <dsp:nvSpPr>
-        <dsp:cNvPr id="0" name=""/>
-        <dsp:cNvSpPr/>
-      </dsp:nvSpPr>
-      <dsp:spPr>
-        <a:xfrm>
-          <a:off x="7505310" y="637954"/>
-          <a:ext cx="541409" cy="541409"/>
-        </a:xfrm>
-        <a:prstGeom prst="downArrow">
-          <a:avLst>
-            <a:gd name="adj1" fmla="val 55000"/>
-            <a:gd name="adj2" fmla="val 45000"/>
-          </a:avLst>
-        </a:prstGeom>
-        <a:solidFill>
-          <a:schemeClr val="accent2">
-            <a:tint val="40000"/>
-            <a:alpha val="90000"/>
-            <a:hueOff val="0"/>
-            <a:satOff val="0"/>
-            <a:lumOff val="0"/>
-            <a:alphaOff val="0"/>
-          </a:schemeClr>
-        </a:solidFill>
-        <a:ln w="15875" cap="flat" cmpd="sng" algn="ctr">
-          <a:solidFill>
-            <a:schemeClr val="accent2">
-              <a:tint val="40000"/>
-              <a:alpha val="90000"/>
-              <a:hueOff val="0"/>
-              <a:satOff val="0"/>
-              <a:lumOff val="0"/>
-              <a:alphaOff val="0"/>
-            </a:schemeClr>
-          </a:solidFill>
-          <a:prstDash val="solid"/>
-        </a:ln>
-        <a:effectLst/>
-      </dsp:spPr>
-      <dsp:style>
-        <a:lnRef idx="2">
-          <a:scrgbClr r="0" g="0" b="0"/>
-        </a:lnRef>
-        <a:fillRef idx="1">
-          <a:scrgbClr r="0" g="0" b="0"/>
-        </a:fillRef>
-        <a:effectRef idx="0">
-          <a:scrgbClr r="0" g="0" b="0"/>
-        </a:effectRef>
-        <a:fontRef idx="minor"/>
-      </dsp:style>
-      <dsp:txBody>
-        <a:bodyPr spcFirstLastPara="0" vert="horz" wrap="square" lIns="30480" tIns="30480" rIns="30480" bIns="30480" numCol="1" spcCol="1270" anchor="ctr" anchorCtr="0">
-          <a:noAutofit/>
-        </a:bodyPr>
-        <a:lstStyle/>
-        <a:p>
-          <a:pPr marL="0" lvl="0" indent="0" algn="ctr" defTabSz="1066800">
-            <a:lnSpc>
-              <a:spcPct val="90000"/>
-            </a:lnSpc>
-            <a:spcBef>
-              <a:spcPct val="0"/>
-            </a:spcBef>
-            <a:spcAft>
-              <a:spcPct val="35000"/>
-            </a:spcAft>
-            <a:buNone/>
-          </a:pPr>
-          <a:endParaRPr lang="en-US" sz="2400" kern="1200"/>
-        </a:p>
-      </dsp:txBody>
-      <dsp:txXfrm>
-        <a:off x="7627127" y="637954"/>
-        <a:ext cx="297775" cy="407410"/>
-      </dsp:txXfrm>
-    </dsp:sp>
-    <dsp:sp modelId="{DCC81BAF-6E49-4D61-A8C9-35D2BD2314EC}">
-      <dsp:nvSpPr>
-        <dsp:cNvPr id="0" name=""/>
-        <dsp:cNvSpPr/>
-      </dsp:nvSpPr>
-      <dsp:spPr>
-        <a:xfrm>
-          <a:off x="8179223" y="1622335"/>
-          <a:ext cx="541409" cy="541409"/>
-        </a:xfrm>
-        <a:prstGeom prst="downArrow">
-          <a:avLst>
-            <a:gd name="adj1" fmla="val 55000"/>
-            <a:gd name="adj2" fmla="val 45000"/>
-          </a:avLst>
-        </a:prstGeom>
-        <a:solidFill>
-          <a:schemeClr val="accent2">
-            <a:tint val="40000"/>
-            <a:alpha val="90000"/>
-            <a:hueOff val="-928920"/>
-            <a:satOff val="1961"/>
-            <a:lumOff val="202"/>
-            <a:alphaOff val="0"/>
-          </a:schemeClr>
-        </a:solidFill>
-        <a:ln w="15875" cap="flat" cmpd="sng" algn="ctr">
-          <a:solidFill>
-            <a:schemeClr val="accent2">
-              <a:tint val="40000"/>
-              <a:alpha val="90000"/>
-              <a:hueOff val="-928920"/>
-              <a:satOff val="1961"/>
-              <a:lumOff val="202"/>
-              <a:alphaOff val="0"/>
-            </a:schemeClr>
-          </a:solidFill>
-          <a:prstDash val="solid"/>
-        </a:ln>
-        <a:effectLst/>
-      </dsp:spPr>
-      <dsp:style>
-        <a:lnRef idx="2">
-          <a:scrgbClr r="0" g="0" b="0"/>
-        </a:lnRef>
-        <a:fillRef idx="1">
-          <a:scrgbClr r="0" g="0" b="0"/>
-        </a:fillRef>
-        <a:effectRef idx="0">
-          <a:scrgbClr r="0" g="0" b="0"/>
-        </a:effectRef>
-        <a:fontRef idx="minor"/>
-      </dsp:style>
-      <dsp:txBody>
-        <a:bodyPr spcFirstLastPara="0" vert="horz" wrap="square" lIns="30480" tIns="30480" rIns="30480" bIns="30480" numCol="1" spcCol="1270" anchor="ctr" anchorCtr="0">
-          <a:noAutofit/>
-        </a:bodyPr>
-        <a:lstStyle/>
-        <a:p>
-          <a:pPr marL="0" lvl="0" indent="0" algn="ctr" defTabSz="1066800">
-            <a:lnSpc>
-              <a:spcPct val="90000"/>
-            </a:lnSpc>
-            <a:spcBef>
-              <a:spcPct val="0"/>
-            </a:spcBef>
-            <a:spcAft>
-              <a:spcPct val="35000"/>
-            </a:spcAft>
-            <a:buNone/>
-          </a:pPr>
-          <a:endParaRPr lang="en-US" sz="2400" kern="1200"/>
-        </a:p>
-      </dsp:txBody>
-      <dsp:txXfrm>
-        <a:off x="8301040" y="1622335"/>
-        <a:ext cx="297775" cy="407410"/>
-      </dsp:txXfrm>
-    </dsp:sp>
-    <dsp:sp modelId="{07930A7A-7AD4-4AC3-8910-DAA16B8A4EFC}">
-      <dsp:nvSpPr>
-        <dsp:cNvPr id="0" name=""/>
-        <dsp:cNvSpPr/>
-      </dsp:nvSpPr>
-      <dsp:spPr>
-        <a:xfrm>
-          <a:off x="8843077" y="2606716"/>
-          <a:ext cx="541409" cy="541409"/>
-        </a:xfrm>
-        <a:prstGeom prst="downArrow">
-          <a:avLst>
-            <a:gd name="adj1" fmla="val 55000"/>
-            <a:gd name="adj2" fmla="val 45000"/>
-          </a:avLst>
-        </a:prstGeom>
-        <a:solidFill>
-          <a:schemeClr val="accent2">
-            <a:tint val="40000"/>
-            <a:alpha val="90000"/>
-            <a:hueOff val="-1857840"/>
-            <a:satOff val="3922"/>
-            <a:lumOff val="404"/>
-            <a:alphaOff val="0"/>
-          </a:schemeClr>
-        </a:solidFill>
-        <a:ln w="15875" cap="flat" cmpd="sng" algn="ctr">
-          <a:solidFill>
-            <a:schemeClr val="accent2">
-              <a:tint val="40000"/>
-              <a:alpha val="90000"/>
-              <a:hueOff val="-1857840"/>
-              <a:satOff val="3922"/>
-              <a:lumOff val="404"/>
-              <a:alphaOff val="0"/>
-            </a:schemeClr>
-          </a:solidFill>
-          <a:prstDash val="solid"/>
-        </a:ln>
-        <a:effectLst/>
-      </dsp:spPr>
-      <dsp:style>
-        <a:lnRef idx="2">
-          <a:scrgbClr r="0" g="0" b="0"/>
-        </a:lnRef>
-        <a:fillRef idx="1">
-          <a:scrgbClr r="0" g="0" b="0"/>
-        </a:fillRef>
-        <a:effectRef idx="0">
-          <a:scrgbClr r="0" g="0" b="0"/>
-        </a:effectRef>
-        <a:fontRef idx="minor"/>
-      </dsp:style>
-      <dsp:txBody>
-        <a:bodyPr spcFirstLastPara="0" vert="horz" wrap="square" lIns="30480" tIns="30480" rIns="30480" bIns="30480" numCol="1" spcCol="1270" anchor="ctr" anchorCtr="0">
-          <a:noAutofit/>
-        </a:bodyPr>
-        <a:lstStyle/>
-        <a:p>
-          <a:pPr marL="0" lvl="0" indent="0" algn="ctr" defTabSz="1066800">
-            <a:lnSpc>
-              <a:spcPct val="90000"/>
-            </a:lnSpc>
-            <a:spcBef>
-              <a:spcPct val="0"/>
-            </a:spcBef>
-            <a:spcAft>
-              <a:spcPct val="35000"/>
-            </a:spcAft>
-            <a:buNone/>
-          </a:pPr>
-          <a:endParaRPr lang="en-US" sz="2400" kern="1200"/>
-        </a:p>
-      </dsp:txBody>
-      <dsp:txXfrm>
-        <a:off x="8964894" y="2606716"/>
-        <a:ext cx="297775" cy="407410"/>
+        <a:off x="36896" y="2546169"/>
+        <a:ext cx="3374467" cy="682028"/>
       </dsp:txXfrm>
     </dsp:sp>
   </dsp:spTree>
@@ -7858,11 +7511,12 @@
 </file>
 
 <file path=ppt/diagrams/layout2.xml><?xml version="1.0" encoding="utf-8"?>
-<dgm:layoutDef xmlns:dgm="http://schemas.openxmlformats.org/drawingml/2006/diagram" xmlns:a="http://schemas.openxmlformats.org/drawingml/2006/main" uniqueId="urn:microsoft.com/office/officeart/2005/8/layout/vProcess5">
+<dgm:layoutDef xmlns:dgm="http://schemas.openxmlformats.org/drawingml/2006/diagram" xmlns:a="http://schemas.openxmlformats.org/drawingml/2006/main" uniqueId="urn:microsoft.com/office/officeart/2005/8/layout/vList2">
   <dgm:title val=""/>
   <dgm:desc val=""/>
   <dgm:catLst>
-    <dgm:cat type="process" pri="14000"/>
+    <dgm:cat type="list" pri="3000"/>
+    <dgm:cat type="convert" pri="1000"/>
   </dgm:catLst>
   <dgm:sampData>
     <dgm:dataModel>
@@ -7871,17 +7525,21 @@
         <dgm:pt modelId="1">
           <dgm:prSet phldr="1"/>
         </dgm:pt>
+        <dgm:pt modelId="11">
+          <dgm:prSet phldr="1"/>
+        </dgm:pt>
         <dgm:pt modelId="2">
           <dgm:prSet phldr="1"/>
         </dgm:pt>
-        <dgm:pt modelId="3">
+        <dgm:pt modelId="21">
           <dgm:prSet phldr="1"/>
         </dgm:pt>
       </dgm:ptLst>
       <dgm:cxnLst>
-        <dgm:cxn modelId="5" srcId="0" destId="1" srcOrd="0" destOrd="0"/>
-        <dgm:cxn modelId="6" srcId="0" destId="2" srcOrd="1" destOrd="0"/>
-        <dgm:cxn modelId="7" srcId="0" destId="3" srcOrd="2" destOrd="0"/>
+        <dgm:cxn modelId="4" srcId="0" destId="1" srcOrd="0" destOrd="0"/>
+        <dgm:cxn modelId="5" srcId="0" destId="2" srcOrd="1" destOrd="0"/>
+        <dgm:cxn modelId="12" srcId="1" destId="11" srcOrd="0" destOrd="0"/>
+        <dgm:cxn modelId="23" srcId="2" destId="21" srcOrd="0" destOrd="0"/>
       </dgm:cxnLst>
       <dgm:bg/>
       <dgm:whole/>
@@ -7912,1173 +7570,109 @@
         <dgm:pt modelId="4"/>
       </dgm:ptLst>
       <dgm:cxnLst>
-        <dgm:cxn modelId="6" srcId="0" destId="1" srcOrd="0" destOrd="0"/>
-        <dgm:cxn modelId="7" srcId="0" destId="2" srcOrd="1" destOrd="0"/>
-        <dgm:cxn modelId="8" srcId="0" destId="3" srcOrd="2" destOrd="0"/>
-        <dgm:cxn modelId="9" srcId="0" destId="4" srcOrd="3" destOrd="0"/>
+        <dgm:cxn modelId="5" srcId="0" destId="1" srcOrd="0" destOrd="0"/>
+        <dgm:cxn modelId="6" srcId="0" destId="2" srcOrd="1" destOrd="0"/>
+        <dgm:cxn modelId="7" srcId="0" destId="3" srcOrd="2" destOrd="0"/>
+        <dgm:cxn modelId="8" srcId="0" destId="4" srcOrd="3" destOrd="0"/>
       </dgm:cxnLst>
       <dgm:bg/>
       <dgm:whole/>
     </dgm:dataModel>
   </dgm:clrData>
-  <dgm:layoutNode name="outerComposite">
+  <dgm:layoutNode name="linear">
     <dgm:varLst>
-      <dgm:chMax val="5"/>
-      <dgm:dir/>
+      <dgm:animLvl val="lvl"/>
       <dgm:resizeHandles val="exact"/>
     </dgm:varLst>
-    <dgm:alg type="composite"/>
+    <dgm:alg type="lin">
+      <dgm:param type="linDir" val="fromT"/>
+      <dgm:param type="vertAlign" val="mid"/>
+    </dgm:alg>
     <dgm:shape xmlns:r="http://schemas.openxmlformats.org/officeDocument/2006/relationships" r:blip="">
       <dgm:adjLst/>
     </dgm:shape>
     <dgm:presOf/>
-    <dgm:choose name="Name0">
-      <dgm:if name="Name1" func="var" arg="dir" op="equ" val="norm">
+    <dgm:constrLst>
+      <dgm:constr type="w" for="ch" forName="parentText" refType="w"/>
+      <dgm:constr type="h" for="ch" forName="parentText" refType="primFontSz" refFor="ch" refForName="parentText" fact="0.52"/>
+      <dgm:constr type="w" for="ch" forName="childText" refType="w"/>
+      <dgm:constr type="h" for="ch" forName="childText" refType="primFontSz" refFor="ch" refForName="parentText" fact="0.46"/>
+      <dgm:constr type="h" for="ch" forName="parentText" op="equ"/>
+      <dgm:constr type="primFontSz" for="ch" forName="parentText" op="equ" val="65"/>
+      <dgm:constr type="primFontSz" for="ch" forName="childText" refType="primFontSz" refFor="ch" refForName="parentText" op="equ"/>
+      <dgm:constr type="h" for="ch" forName="spacer" refType="primFontSz" refFor="ch" refForName="parentText" fact="0.08"/>
+    </dgm:constrLst>
+    <dgm:ruleLst>
+      <dgm:rule type="primFontSz" for="ch" forName="parentText" val="5" fact="NaN" max="NaN"/>
+    </dgm:ruleLst>
+    <dgm:forEach name="Name0" axis="ch" ptType="node">
+      <dgm:layoutNode name="parentText" styleLbl="node1">
+        <dgm:varLst>
+          <dgm:chMax val="0"/>
+          <dgm:bulletEnabled val="1"/>
+        </dgm:varLst>
+        <dgm:alg type="tx">
+          <dgm:param type="parTxLTRAlign" val="l"/>
+          <dgm:param type="parTxRTLAlign" val="r"/>
+        </dgm:alg>
+        <dgm:shape xmlns:r="http://schemas.openxmlformats.org/officeDocument/2006/relationships" type="roundRect" r:blip="">
+          <dgm:adjLst/>
+        </dgm:shape>
+        <dgm:presOf axis="self"/>
         <dgm:constrLst>
-          <dgm:constr type="primFontSz" for="ch" ptType="node" op="equ" val="65"/>
-          <dgm:constr type="w" for="ch" forName="dummyMaxCanvas" refType="w"/>
-          <dgm:constr type="h" for="ch" forName="dummyMaxCanvas" refType="h"/>
-          <dgm:constr type="w" for="ch" forName="OneNode_1" refType="w"/>
-          <dgm:constr type="h" for="ch" forName="OneNode_1" refType="h" fact="0.5"/>
-          <dgm:constr type="ctrY" for="ch" forName="OneNode_1" refType="h" fact="0.5"/>
-          <dgm:constr type="w" for="ch" forName="TwoNodes_1" refType="w" fact="0.85"/>
-          <dgm:constr type="h" for="ch" forName="TwoNodes_1" refType="h" fact="0.45"/>
-          <dgm:constr type="t" for="ch" forName="TwoNodes_1"/>
-          <dgm:constr type="l" for="ch" forName="TwoNodes_1"/>
-          <dgm:constr type="w" for="ch" forName="TwoNodes_2" refType="w" fact="0.85"/>
-          <dgm:constr type="h" for="ch" forName="TwoNodes_2" refType="h" fact="0.45"/>
-          <dgm:constr type="b" for="ch" forName="TwoNodes_2" refType="h"/>
-          <dgm:constr type="r" for="ch" forName="TwoNodes_2" refType="w"/>
-          <dgm:constr type="w" for="ch" forName="TwoConn_1-2" refType="h" refFor="ch" refForName="TwoNodes_1" fact="0.65"/>
-          <dgm:constr type="h" for="ch" forName="TwoConn_1-2" refType="h" refFor="ch" refForName="TwoNodes_1" fact="0.65"/>
-          <dgm:constr type="ctrY" for="ch" forName="TwoConn_1-2" refType="h" fact="0.5"/>
-          <dgm:constr type="r" for="ch" forName="TwoConn_1-2" refType="r" refFor="ch" refForName="TwoNodes_1"/>
-          <dgm:constr type="r" for="ch" forName="TwoNodes_1_text" refType="l" refFor="ch" refForName="TwoConn_1-2"/>
-          <dgm:constr type="rOff" for="ch" forName="TwoNodes_1_text" refType="w" refFor="ch" refForName="TwoConn_1-2" fact="-0.5"/>
-          <dgm:constr type="t" for="ch" forName="TwoNodes_1_text" refType="t" refFor="ch" refForName="TwoNodes_1"/>
-          <dgm:constr type="b" for="ch" forName="TwoNodes_1_text" refType="b" refFor="ch" refForName="TwoNodes_1"/>
-          <dgm:constr type="l" for="ch" forName="TwoNodes_1_text" refType="l" refFor="ch" refForName="TwoNodes_1"/>
-          <dgm:constr type="r" for="ch" forName="TwoNodes_2_text" refType="l" refFor="ch" refForName="TwoConn_1-2"/>
-          <dgm:constr type="t" for="ch" forName="TwoNodes_2_text" refType="t" refFor="ch" refForName="TwoNodes_2"/>
-          <dgm:constr type="b" for="ch" forName="TwoNodes_2_text" refType="b" refFor="ch" refForName="TwoNodes_2"/>
-          <dgm:constr type="l" for="ch" forName="TwoNodes_2_text" refType="l" refFor="ch" refForName="TwoNodes_2"/>
-          <dgm:constr type="w" for="ch" forName="ThreeNodes_1" refType="w" fact="0.85"/>
-          <dgm:constr type="h" for="ch" forName="ThreeNodes_1" refType="h" fact="0.3"/>
-          <dgm:constr type="t" for="ch" forName="ThreeNodes_1"/>
-          <dgm:constr type="l" for="ch" forName="ThreeNodes_1"/>
-          <dgm:constr type="w" for="ch" forName="ThreeNodes_2" refType="w" fact="0.85"/>
-          <dgm:constr type="h" for="ch" forName="ThreeNodes_2" refType="h" fact="0.3"/>
-          <dgm:constr type="ctrY" for="ch" forName="ThreeNodes_2" refType="h" fact="0.5"/>
-          <dgm:constr type="ctrX" for="ch" forName="ThreeNodes_2" refType="w" fact="0.5"/>
-          <dgm:constr type="w" for="ch" forName="ThreeNodes_3" refType="w" fact="0.85"/>
-          <dgm:constr type="h" for="ch" forName="ThreeNodes_3" refType="h" fact="0.3"/>
-          <dgm:constr type="b" for="ch" forName="ThreeNodes_3" refType="h"/>
-          <dgm:constr type="r" for="ch" forName="ThreeNodes_3" refType="w"/>
-          <dgm:constr type="w" for="ch" forName="ThreeConn_1-2" refType="h" refFor="ch" refForName="ThreeNodes_1" fact="0.65"/>
-          <dgm:constr type="h" for="ch" forName="ThreeConn_1-2" refType="h" refFor="ch" refForName="ThreeNodes_1" fact="0.65"/>
-          <dgm:constr type="ctrY" for="ch" forName="ThreeConn_1-2" refType="h" fact="0.325"/>
-          <dgm:constr type="r" for="ch" forName="ThreeConn_1-2" refType="r" refFor="ch" refForName="ThreeNodes_1"/>
-          <dgm:constr type="w" for="ch" forName="ThreeConn_2-3" refType="h" refFor="ch" refForName="ThreeNodes_2" fact="0.65"/>
-          <dgm:constr type="h" for="ch" forName="ThreeConn_2-3" refType="h" refFor="ch" refForName="ThreeNodes_2" fact="0.65"/>
-          <dgm:constr type="ctrY" for="ch" forName="ThreeConn_2-3" refType="h" fact="0.673"/>
-          <dgm:constr type="r" for="ch" forName="ThreeConn_2-3" refType="r" refFor="ch" refForName="ThreeNodes_2"/>
-          <dgm:constr type="r" for="ch" forName="ThreeNodes_1_text" refType="l" refFor="ch" refForName="ThreeConn_1-2"/>
-          <dgm:constr type="rOff" for="ch" forName="ThreeNodes_1_text" refType="w" refFor="ch" refForName="ThreeConn_1-2" fact="-0.57"/>
-          <dgm:constr type="t" for="ch" forName="ThreeNodes_1_text" refType="t" refFor="ch" refForName="ThreeNodes_1"/>
-          <dgm:constr type="b" for="ch" forName="ThreeNodes_1_text" refType="b" refFor="ch" refForName="ThreeNodes_1"/>
-          <dgm:constr type="l" for="ch" forName="ThreeNodes_1_text" refType="l" refFor="ch" refForName="ThreeNodes_1"/>
-          <dgm:constr type="r" for="ch" forName="ThreeNodes_2_text" refType="l" refFor="ch" refForName="ThreeConn_1-2"/>
-          <dgm:constr type="t" for="ch" forName="ThreeNodes_2_text" refType="t" refFor="ch" refForName="ThreeNodes_2"/>
-          <dgm:constr type="b" for="ch" forName="ThreeNodes_2_text" refType="b" refFor="ch" refForName="ThreeNodes_2"/>
-          <dgm:constr type="l" for="ch" forName="ThreeNodes_2_text" refType="l" refFor="ch" refForName="ThreeNodes_2"/>
-          <dgm:constr type="r" for="ch" forName="ThreeNodes_3_text" refType="l" refFor="ch" refForName="ThreeConn_2-3"/>
-          <dgm:constr type="t" for="ch" forName="ThreeNodes_3_text" refType="t" refFor="ch" refForName="ThreeNodes_3"/>
-          <dgm:constr type="b" for="ch" forName="ThreeNodes_3_text" refType="b" refFor="ch" refForName="ThreeNodes_3"/>
-          <dgm:constr type="l" for="ch" forName="ThreeNodes_3_text" refType="l" refFor="ch" refForName="ThreeNodes_3"/>
-          <dgm:constr type="w" for="ch" forName="FourNodes_1" refType="w" fact="0.8"/>
-          <dgm:constr type="h" for="ch" forName="FourNodes_1" refType="h" fact="0.22"/>
-          <dgm:constr type="t" for="ch" forName="FourNodes_1"/>
-          <dgm:constr type="l" for="ch" forName="FourNodes_1"/>
-          <dgm:constr type="w" for="ch" forName="FourNodes_2" refType="w" fact="0.8"/>
-          <dgm:constr type="h" for="ch" forName="FourNodes_2" refType="h" fact="0.22"/>
-          <dgm:constr type="ctrY" for="ch" forName="FourNodes_2" refType="h" fact="0.37"/>
-          <dgm:constr type="ctrX" for="ch" forName="FourNodes_2" refType="w" fact="0.467"/>
-          <dgm:constr type="w" for="ch" forName="FourNodes_3" refType="w" fact="0.8"/>
-          <dgm:constr type="h" for="ch" forName="FourNodes_3" refType="h" fact="0.22"/>
-          <dgm:constr type="ctrY" for="ch" forName="FourNodes_3" refType="h" fact="0.63"/>
-          <dgm:constr type="ctrX" for="ch" forName="FourNodes_3" refType="w" fact="0.533"/>
-          <dgm:constr type="w" for="ch" forName="FourNodes_4" refType="w" fact="0.8"/>
-          <dgm:constr type="h" for="ch" forName="FourNodes_4" refType="h" fact="0.22"/>
-          <dgm:constr type="b" for="ch" forName="FourNodes_4" refType="h"/>
-          <dgm:constr type="r" for="ch" forName="FourNodes_4" refType="w"/>
-          <dgm:constr type="w" for="ch" forName="FourConn_1-2" refType="h" refFor="ch" refForName="FourNodes_1" fact="0.65"/>
-          <dgm:constr type="h" for="ch" forName="FourConn_1-2" refType="h" refFor="ch" refForName="FourNodes_1" fact="0.65"/>
-          <dgm:constr type="ctrY" for="ch" forName="FourConn_1-2" refType="h" fact="0.24"/>
-          <dgm:constr type="r" for="ch" forName="FourConn_1-2" refType="r" refFor="ch" refForName="FourNodes_1"/>
-          <dgm:constr type="w" for="ch" forName="FourConn_2-3" refType="h" refFor="ch" refForName="FourNodes_2" fact="0.65"/>
-          <dgm:constr type="h" for="ch" forName="FourConn_2-3" refType="h" refFor="ch" refForName="FourNodes_2" fact="0.65"/>
-          <dgm:constr type="ctrY" for="ch" forName="FourConn_2-3" refType="h" fact="0.5"/>
-          <dgm:constr type="r" for="ch" forName="FourConn_2-3" refType="r" refFor="ch" refForName="FourNodes_2"/>
-          <dgm:constr type="w" for="ch" forName="FourConn_3-4" refType="h" refFor="ch" refForName="FourNodes_3" fact="0.65"/>
-          <dgm:constr type="h" for="ch" forName="FourConn_3-4" refType="h" refFor="ch" refForName="FourNodes_3" fact="0.65"/>
-          <dgm:constr type="ctrY" for="ch" forName="FourConn_3-4" refType="h" fact="0.76"/>
-          <dgm:constr type="r" for="ch" forName="FourConn_3-4" refType="r" refFor="ch" refForName="FourNodes_3"/>
-          <dgm:constr type="r" for="ch" forName="FourNodes_1_text" refType="l" refFor="ch" refForName="FourConn_1-2"/>
-          <dgm:constr type="rOff" for="ch" forName="FourNodes_1_text" refType="w" refFor="ch" refForName="FourConn_1-2" fact="-0.7"/>
-          <dgm:constr type="t" for="ch" forName="FourNodes_1_text" refType="t" refFor="ch" refForName="FourNodes_1"/>
-          <dgm:constr type="b" for="ch" forName="FourNodes_1_text" refType="b" refFor="ch" refForName="FourNodes_1"/>
-          <dgm:constr type="l" for="ch" forName="FourNodes_1_text" refType="l" refFor="ch" refForName="FourNodes_1"/>
-          <dgm:constr type="r" for="ch" forName="FourNodes_2_text" refType="l" refFor="ch" refForName="FourConn_1-2"/>
-          <dgm:constr type="t" for="ch" forName="FourNodes_2_text" refType="t" refFor="ch" refForName="FourNodes_2"/>
-          <dgm:constr type="b" for="ch" forName="FourNodes_2_text" refType="b" refFor="ch" refForName="FourNodes_2"/>
-          <dgm:constr type="l" for="ch" forName="FourNodes_2_text" refType="l" refFor="ch" refForName="FourNodes_2"/>
-          <dgm:constr type="r" for="ch" forName="FourNodes_3_text" refType="l" refFor="ch" refForName="FourConn_2-3"/>
-          <dgm:constr type="t" for="ch" forName="FourNodes_3_text" refType="t" refFor="ch" refForName="FourNodes_3"/>
-          <dgm:constr type="b" for="ch" forName="FourNodes_3_text" refType="b" refFor="ch" refForName="FourNodes_3"/>
-          <dgm:constr type="l" for="ch" forName="FourNodes_3_text" refType="l" refFor="ch" refForName="FourNodes_3"/>
-          <dgm:constr type="r" for="ch" forName="FourNodes_4_text" refType="l" refFor="ch" refForName="FourConn_3-4"/>
-          <dgm:constr type="t" for="ch" forName="FourNodes_4_text" refType="t" refFor="ch" refForName="FourNodes_4"/>
-          <dgm:constr type="b" for="ch" forName="FourNodes_4_text" refType="b" refFor="ch" refForName="FourNodes_4"/>
-          <dgm:constr type="l" for="ch" forName="FourNodes_4_text" refType="l" refFor="ch" refForName="FourNodes_4"/>
-          <dgm:constr type="w" for="ch" forName="FiveNodes_1" refType="w" fact="0.77"/>
-          <dgm:constr type="h" for="ch" forName="FiveNodes_1" refType="h" fact="0.18"/>
-          <dgm:constr type="t" for="ch" forName="FiveNodes_1"/>
-          <dgm:constr type="l" for="ch" forName="FiveNodes_1"/>
-          <dgm:constr type="w" for="ch" forName="FiveNodes_2" refType="w" fact="0.77"/>
-          <dgm:constr type="h" for="ch" forName="FiveNodes_2" refType="h" fact="0.18"/>
-          <dgm:constr type="ctrY" for="ch" forName="FiveNodes_2" refType="h" fact="0.295"/>
-          <dgm:constr type="ctrX" for="ch" forName="FiveNodes_2" refType="w" fact="0.4425"/>
-          <dgm:constr type="w" for="ch" forName="FiveNodes_3" refType="w" fact="0.77"/>
-          <dgm:constr type="h" for="ch" forName="FiveNodes_3" refType="h" fact="0.18"/>
-          <dgm:constr type="ctrY" for="ch" forName="FiveNodes_3" refType="h" fact="0.5"/>
-          <dgm:constr type="ctrX" for="ch" forName="FiveNodes_3" refType="w" fact="0.5"/>
-          <dgm:constr type="w" for="ch" forName="FiveNodes_4" refType="w" fact="0.77"/>
-          <dgm:constr type="h" for="ch" forName="FiveNodes_4" refType="h" fact="0.18"/>
-          <dgm:constr type="ctrY" for="ch" forName="FiveNodes_4" refType="h" fact="0.705"/>
-          <dgm:constr type="ctrX" for="ch" forName="FiveNodes_4" refType="w" fact="0.5575"/>
-          <dgm:constr type="w" for="ch" forName="FiveNodes_5" refType="w" fact="0.77"/>
-          <dgm:constr type="h" for="ch" forName="FiveNodes_5" refType="h" fact="0.18"/>
-          <dgm:constr type="b" for="ch" forName="FiveNodes_5" refType="h"/>
-          <dgm:constr type="r" for="ch" forName="FiveNodes_5" refType="w"/>
-          <dgm:constr type="w" for="ch" forName="FiveConn_1-2" refType="h" refFor="ch" refForName="FiveNodes_1" fact="0.65"/>
-          <dgm:constr type="h" for="ch" forName="FiveConn_1-2" refType="h" refFor="ch" refForName="FiveNodes_1" fact="0.65"/>
-          <dgm:constr type="ctrY" for="ch" forName="FiveConn_1-2" refType="h" fact="0.19"/>
-          <dgm:constr type="r" for="ch" forName="FiveConn_1-2" refType="r" refFor="ch" refForName="FiveNodes_1"/>
-          <dgm:constr type="w" for="ch" forName="FiveConn_2-3" refType="h" refFor="ch" refForName="FiveNodes_2" fact="0.65"/>
-          <dgm:constr type="h" for="ch" forName="FiveConn_2-3" refType="h" refFor="ch" refForName="FiveNodes_2" fact="0.65"/>
-          <dgm:constr type="ctrY" for="ch" forName="FiveConn_2-3" refType="h" fact="0.395"/>
-          <dgm:constr type="r" for="ch" forName="FiveConn_2-3" refType="r" refFor="ch" refForName="FiveNodes_2"/>
-          <dgm:constr type="w" for="ch" forName="FiveConn_3-4" refType="h" refFor="ch" refForName="FiveNodes_3" fact="0.65"/>
-          <dgm:constr type="h" for="ch" forName="FiveConn_3-4" refType="h" refFor="ch" refForName="FiveNodes_3" fact="0.65"/>
-          <dgm:constr type="ctrY" for="ch" forName="FiveConn_3-4" refType="h" fact="0.597"/>
-          <dgm:constr type="r" for="ch" forName="FiveConn_3-4" refType="r" refFor="ch" refForName="FiveNodes_3"/>
-          <dgm:constr type="w" for="ch" forName="FiveConn_4-5" refType="h" refFor="ch" refForName="FiveNodes_4" fact="0.65"/>
-          <dgm:constr type="h" for="ch" forName="FiveConn_4-5" refType="h" refFor="ch" refForName="FiveNodes_4" fact="0.65"/>
-          <dgm:constr type="ctrY" for="ch" forName="FiveConn_4-5" refType="h" fact="0.804"/>
-          <dgm:constr type="r" for="ch" forName="FiveConn_4-5" refType="r" refFor="ch" refForName="FiveNodes_4"/>
-          <dgm:constr type="r" for="ch" forName="FiveNodes_1_text" refType="l" refFor="ch" refForName="FiveConn_1-2"/>
-          <dgm:constr type="rOff" for="ch" forName="FiveNodes_1_text" refType="w" refFor="ch" refForName="FiveConn_1-2" fact="-0.75"/>
-          <dgm:constr type="t" for="ch" forName="FiveNodes_1_text" refType="t" refFor="ch" refForName="FiveNodes_1"/>
-          <dgm:constr type="b" for="ch" forName="FiveNodes_1_text" refType="b" refFor="ch" refForName="FiveNodes_1"/>
-          <dgm:constr type="l" for="ch" forName="FiveNodes_1_text" refType="l" refFor="ch" refForName="FiveNodes_1"/>
-          <dgm:constr type="r" for="ch" forName="FiveNodes_2_text" refType="l" refFor="ch" refForName="FiveConn_1-2"/>
-          <dgm:constr type="t" for="ch" forName="FiveNodes_2_text" refType="t" refFor="ch" refForName="FiveNodes_2"/>
-          <dgm:constr type="b" for="ch" forName="FiveNodes_2_text" refType="b" refFor="ch" refForName="FiveNodes_2"/>
-          <dgm:constr type="l" for="ch" forName="FiveNodes_2_text" refType="l" refFor="ch" refForName="FiveNodes_2"/>
-          <dgm:constr type="r" for="ch" forName="FiveNodes_3_text" refType="l" refFor="ch" refForName="FiveConn_2-3"/>
-          <dgm:constr type="t" for="ch" forName="FiveNodes_3_text" refType="t" refFor="ch" refForName="FiveNodes_3"/>
-          <dgm:constr type="b" for="ch" forName="FiveNodes_3_text" refType="b" refFor="ch" refForName="FiveNodes_3"/>
-          <dgm:constr type="l" for="ch" forName="FiveNodes_3_text" refType="l" refFor="ch" refForName="FiveNodes_3"/>
-          <dgm:constr type="r" for="ch" forName="FiveNodes_4_text" refType="l" refFor="ch" refForName="FiveConn_3-4"/>
-          <dgm:constr type="t" for="ch" forName="FiveNodes_4_text" refType="t" refFor="ch" refForName="FiveNodes_4"/>
-          <dgm:constr type="b" for="ch" forName="FiveNodes_4_text" refType="b" refFor="ch" refForName="FiveNodes_4"/>
-          <dgm:constr type="l" for="ch" forName="FiveNodes_4_text" refType="l" refFor="ch" refForName="FiveNodes_4"/>
-          <dgm:constr type="r" for="ch" forName="FiveNodes_5_text" refType="l" refFor="ch" refForName="FiveConn_4-5"/>
-          <dgm:constr type="t" for="ch" forName="FiveNodes_5_text" refType="t" refFor="ch" refForName="FiveNodes_5"/>
-          <dgm:constr type="b" for="ch" forName="FiveNodes_5_text" refType="b" refFor="ch" refForName="FiveNodes_5"/>
-          <dgm:constr type="l" for="ch" forName="FiveNodes_5_text" refType="l" refFor="ch" refForName="FiveNodes_5"/>
+          <dgm:constr type="tMarg" refType="primFontSz" fact="0.3"/>
+          <dgm:constr type="bMarg" refType="primFontSz" fact="0.3"/>
+          <dgm:constr type="lMarg" refType="primFontSz" fact="0.3"/>
+          <dgm:constr type="rMarg" refType="primFontSz" fact="0.3"/>
         </dgm:constrLst>
-      </dgm:if>
-      <dgm:else name="Name2">
-        <dgm:constrLst>
-          <dgm:constr type="primFontSz" for="ch" ptType="node" op="equ" val="65"/>
-          <dgm:constr type="w" for="ch" forName="dummyMaxCanvas" refType="w"/>
-          <dgm:constr type="h" for="ch" forName="dummyMaxCanvas" refType="h"/>
-          <dgm:constr type="w" for="ch" forName="OneNode_1" refType="w"/>
-          <dgm:constr type="h" for="ch" forName="OneNode_1" refType="h" fact="0.5"/>
-          <dgm:constr type="ctrY" for="ch" forName="OneNode_1" refType="h" fact="0.5"/>
-          <dgm:constr type="w" for="ch" forName="TwoNodes_1" refType="w" fact="0.85"/>
-          <dgm:constr type="h" for="ch" forName="TwoNodes_1" refType="h" fact="0.45"/>
-          <dgm:constr type="t" for="ch" forName="TwoNodes_1"/>
-          <dgm:constr type="r" for="ch" forName="TwoNodes_1" refType="w"/>
-          <dgm:constr type="w" for="ch" forName="TwoNodes_2" refType="w" fact="0.85"/>
-          <dgm:constr type="h" for="ch" forName="TwoNodes_2" refType="h" fact="0.45"/>
-          <dgm:constr type="b" for="ch" forName="TwoNodes_2" refType="h"/>
-          <dgm:constr type="l" for="ch" forName="TwoNodes_2"/>
-          <dgm:constr type="w" for="ch" forName="TwoConn_1-2" refType="h" refFor="ch" refForName="TwoNodes_1" fact="0.65"/>
-          <dgm:constr type="h" for="ch" forName="TwoConn_1-2" refType="h" refFor="ch" refForName="TwoNodes_1" fact="0.65"/>
-          <dgm:constr type="ctrY" for="ch" forName="TwoConn_1-2" refType="h" fact="0.5"/>
-          <dgm:constr type="l" for="ch" forName="TwoConn_1-2" refType="l" refFor="ch" refForName="TwoNodes_1"/>
-          <dgm:constr type="l" for="ch" forName="TwoNodes_1_text" refType="r" refFor="ch" refForName="TwoConn_1-2"/>
-          <dgm:constr type="lOff" for="ch" forName="TwoNodes_1_text" refType="w" refFor="ch" refForName="TwoConn_1-2" fact="0.5"/>
-          <dgm:constr type="t" for="ch" forName="TwoNodes_1_text" refType="t" refFor="ch" refForName="TwoNodes_1"/>
-          <dgm:constr type="b" for="ch" forName="TwoNodes_1_text" refType="b" refFor="ch" refForName="TwoNodes_1"/>
-          <dgm:constr type="r" for="ch" forName="TwoNodes_1_text" refType="r" refFor="ch" refForName="TwoNodes_1"/>
-          <dgm:constr type="l" for="ch" forName="TwoNodes_2_text" refType="r" refFor="ch" refForName="TwoConn_1-2"/>
-          <dgm:constr type="t" for="ch" forName="TwoNodes_2_text" refType="t" refFor="ch" refForName="TwoNodes_2"/>
-          <dgm:constr type="b" for="ch" forName="TwoNodes_2_text" refType="b" refFor="ch" refForName="TwoNodes_2"/>
-          <dgm:constr type="r" for="ch" forName="TwoNodes_2_text" refType="r" refFor="ch" refForName="TwoNodes_2"/>
-          <dgm:constr type="w" for="ch" forName="ThreeNodes_1" refType="w" fact="0.85"/>
-          <dgm:constr type="h" for="ch" forName="ThreeNodes_1" refType="h" fact="0.3"/>
-          <dgm:constr type="t" for="ch" forName="ThreeNodes_1"/>
-          <dgm:constr type="r" for="ch" forName="ThreeNodes_1" refType="w"/>
-          <dgm:constr type="w" for="ch" forName="ThreeNodes_2" refType="w" fact="0.85"/>
-          <dgm:constr type="h" for="ch" forName="ThreeNodes_2" refType="h" fact="0.3"/>
-          <dgm:constr type="ctrY" for="ch" forName="ThreeNodes_2" refType="h" fact="0.5"/>
-          <dgm:constr type="ctrX" for="ch" forName="ThreeNodes_2" refType="w" fact="0.5"/>
-          <dgm:constr type="w" for="ch" forName="ThreeNodes_3" refType="w" fact="0.85"/>
-          <dgm:constr type="h" for="ch" forName="ThreeNodes_3" refType="h" fact="0.3"/>
-          <dgm:constr type="b" for="ch" forName="ThreeNodes_3" refType="h"/>
-          <dgm:constr type="l" for="ch" forName="ThreeNodes_3"/>
-          <dgm:constr type="w" for="ch" forName="ThreeConn_1-2" refType="h" refFor="ch" refForName="ThreeNodes_1" fact="0.65"/>
-          <dgm:constr type="h" for="ch" forName="ThreeConn_1-2" refType="h" refFor="ch" refForName="ThreeNodes_1" fact="0.65"/>
-          <dgm:constr type="ctrY" for="ch" forName="ThreeConn_1-2" refType="h" fact="0.325"/>
-          <dgm:constr type="l" for="ch" forName="ThreeConn_1-2" refType="l" refFor="ch" refForName="ThreeNodes_1"/>
-          <dgm:constr type="w" for="ch" forName="ThreeConn_2-3" refType="h" refFor="ch" refForName="ThreeNodes_2" fact="0.65"/>
-          <dgm:constr type="h" for="ch" forName="ThreeConn_2-3" refType="h" refFor="ch" refForName="ThreeNodes_2" fact="0.65"/>
-          <dgm:constr type="ctrY" for="ch" forName="ThreeConn_2-3" refType="h" fact="0.673"/>
-          <dgm:constr type="l" for="ch" forName="ThreeConn_2-3" refType="l" refFor="ch" refForName="ThreeNodes_2"/>
-          <dgm:constr type="l" for="ch" forName="ThreeNodes_1_text" refType="r" refFor="ch" refForName="ThreeConn_1-2"/>
-          <dgm:constr type="lOff" for="ch" forName="ThreeNodes_1_text" refType="w" refFor="ch" refForName="ThreeConn_1-2" fact="0.55"/>
-          <dgm:constr type="t" for="ch" forName="ThreeNodes_1_text" refType="t" refFor="ch" refForName="ThreeNodes_1"/>
-          <dgm:constr type="b" for="ch" forName="ThreeNodes_1_text" refType="b" refFor="ch" refForName="ThreeNodes_1"/>
-          <dgm:constr type="r" for="ch" forName="ThreeNodes_1_text" refType="r" refFor="ch" refForName="ThreeNodes_1"/>
-          <dgm:constr type="l" for="ch" forName="ThreeNodes_2_text" refType="r" refFor="ch" refForName="ThreeConn_1-2"/>
-          <dgm:constr type="t" for="ch" forName="ThreeNodes_2_text" refType="t" refFor="ch" refForName="ThreeNodes_2"/>
-          <dgm:constr type="b" for="ch" forName="ThreeNodes_2_text" refType="b" refFor="ch" refForName="ThreeNodes_2"/>
-          <dgm:constr type="r" for="ch" forName="ThreeNodes_2_text" refType="r" refFor="ch" refForName="ThreeNodes_2"/>
-          <dgm:constr type="l" for="ch" forName="ThreeNodes_3_text" refType="r" refFor="ch" refForName="ThreeConn_2-3"/>
-          <dgm:constr type="t" for="ch" forName="ThreeNodes_3_text" refType="t" refFor="ch" refForName="ThreeNodes_3"/>
-          <dgm:constr type="b" for="ch" forName="ThreeNodes_3_text" refType="b" refFor="ch" refForName="ThreeNodes_3"/>
-          <dgm:constr type="r" for="ch" forName="ThreeNodes_3_text" refType="r" refFor="ch" refForName="ThreeNodes_3"/>
-          <dgm:constr type="w" for="ch" forName="FourNodes_1" refType="w" fact="0.8"/>
-          <dgm:constr type="h" for="ch" forName="FourNodes_1" refType="h" fact="0.22"/>
-          <dgm:constr type="t" for="ch" forName="FourNodes_1"/>
-          <dgm:constr type="r" for="ch" forName="FourNodes_1" refType="w"/>
-          <dgm:constr type="w" for="ch" forName="FourNodes_2" refType="w" fact="0.8"/>
-          <dgm:constr type="h" for="ch" forName="FourNodes_2" refType="h" fact="0.22"/>
-          <dgm:constr type="ctrY" for="ch" forName="FourNodes_2" refType="h" fact="0.37"/>
-          <dgm:constr type="ctrX" for="ch" forName="FourNodes_2" refType="w" fact="0.533"/>
-          <dgm:constr type="w" for="ch" forName="FourNodes_3" refType="w" fact="0.8"/>
-          <dgm:constr type="h" for="ch" forName="FourNodes_3" refType="h" fact="0.22"/>
-          <dgm:constr type="ctrY" for="ch" forName="FourNodes_3" refType="h" fact="0.63"/>
-          <dgm:constr type="ctrX" for="ch" forName="FourNodes_3" refType="w" fact="0.467"/>
-          <dgm:constr type="w" for="ch" forName="FourNodes_4" refType="w" fact="0.8"/>
-          <dgm:constr type="h" for="ch" forName="FourNodes_4" refType="h" fact="0.22"/>
-          <dgm:constr type="b" for="ch" forName="FourNodes_4" refType="h"/>
-          <dgm:constr type="l" for="ch" forName="FourNodes_4"/>
-          <dgm:constr type="w" for="ch" forName="FourConn_1-2" refType="h" refFor="ch" refForName="FourNodes_1" fact="0.65"/>
-          <dgm:constr type="h" for="ch" forName="FourConn_1-2" refType="h" refFor="ch" refForName="FourNodes_1" fact="0.65"/>
-          <dgm:constr type="ctrY" for="ch" forName="FourConn_1-2" refType="h" fact="0.24"/>
-          <dgm:constr type="l" for="ch" forName="FourConn_1-2" refType="l" refFor="ch" refForName="FourNodes_1"/>
-          <dgm:constr type="w" for="ch" forName="FourConn_2-3" refType="h" refFor="ch" refForName="FourNodes_2" fact="0.65"/>
-          <dgm:constr type="h" for="ch" forName="FourConn_2-3" refType="h" refFor="ch" refForName="FourNodes_2" fact="0.65"/>
-          <dgm:constr type="ctrY" for="ch" forName="FourConn_2-3" refType="h" fact="0.5"/>
-          <dgm:constr type="l" for="ch" forName="FourConn_2-3" refType="l" refFor="ch" refForName="FourNodes_2"/>
-          <dgm:constr type="w" for="ch" forName="FourConn_3-4" refType="h" refFor="ch" refForName="FourNodes_3" fact="0.65"/>
-          <dgm:constr type="h" for="ch" forName="FourConn_3-4" refType="h" refFor="ch" refForName="FourNodes_3" fact="0.65"/>
-          <dgm:constr type="ctrY" for="ch" forName="FourConn_3-4" refType="h" fact="0.76"/>
-          <dgm:constr type="l" for="ch" forName="FourConn_3-4" refType="l" refFor="ch" refForName="FourNodes_3"/>
-          <dgm:constr type="l" for="ch" forName="FourNodes_1_text" refType="r" refFor="ch" refForName="FourConn_1-2"/>
-          <dgm:constr type="lOff" for="ch" forName="FourNodes_1_text" refType="w" refFor="ch" refForName="FourConn_1-2" fact="0.69"/>
-          <dgm:constr type="t" for="ch" forName="FourNodes_1_text" refType="t" refFor="ch" refForName="FourNodes_1"/>
-          <dgm:constr type="b" for="ch" forName="FourNodes_1_text" refType="b" refFor="ch" refForName="FourNodes_1"/>
-          <dgm:constr type="r" for="ch" forName="FourNodes_1_text" refType="r" refFor="ch" refForName="FourNodes_1"/>
-          <dgm:constr type="l" for="ch" forName="FourNodes_2_text" refType="r" refFor="ch" refForName="FourConn_1-2"/>
-          <dgm:constr type="t" for="ch" forName="FourNodes_2_text" refType="t" refFor="ch" refForName="FourNodes_2"/>
-          <dgm:constr type="b" for="ch" forName="FourNodes_2_text" refType="b" refFor="ch" refForName="FourNodes_2"/>
-          <dgm:constr type="r" for="ch" forName="FourNodes_2_text" refType="r" refFor="ch" refForName="FourNodes_2"/>
-          <dgm:constr type="l" for="ch" forName="FourNodes_3_text" refType="r" refFor="ch" refForName="FourConn_2-3"/>
-          <dgm:constr type="t" for="ch" forName="FourNodes_3_text" refType="t" refFor="ch" refForName="FourNodes_3"/>
-          <dgm:constr type="b" for="ch" forName="FourNodes_3_text" refType="b" refFor="ch" refForName="FourNodes_3"/>
-          <dgm:constr type="r" for="ch" forName="FourNodes_3_text" refType="r" refFor="ch" refForName="FourNodes_3"/>
-          <dgm:constr type="l" for="ch" forName="FourNodes_4_text" refType="r" refFor="ch" refForName="FourConn_3-4"/>
-          <dgm:constr type="t" for="ch" forName="FourNodes_4_text" refType="t" refFor="ch" refForName="FourNodes_4"/>
-          <dgm:constr type="b" for="ch" forName="FourNodes_4_text" refType="b" refFor="ch" refForName="FourNodes_4"/>
-          <dgm:constr type="r" for="ch" forName="FourNodes_4_text" refType="r" refFor="ch" refForName="FourNodes_4"/>
-          <dgm:constr type="w" for="ch" forName="FiveNodes_1" refType="w" fact="0.77"/>
-          <dgm:constr type="h" for="ch" forName="FiveNodes_1" refType="h" fact="0.18"/>
-          <dgm:constr type="t" for="ch" forName="FiveNodes_1"/>
-          <dgm:constr type="r" for="ch" forName="FiveNodes_1" refType="w"/>
-          <dgm:constr type="w" for="ch" forName="FiveNodes_2" refType="w" fact="0.77"/>
-          <dgm:constr type="h" for="ch" forName="FiveNodes_2" refType="h" fact="0.18"/>
-          <dgm:constr type="ctrY" for="ch" forName="FiveNodes_2" refType="h" fact="0.295"/>
-          <dgm:constr type="ctrX" for="ch" forName="FiveNodes_2" refType="w" fact="0.5575"/>
-          <dgm:constr type="w" for="ch" forName="FiveNodes_3" refType="w" fact="0.77"/>
-          <dgm:constr type="h" for="ch" forName="FiveNodes_3" refType="h" fact="0.18"/>
-          <dgm:constr type="ctrY" for="ch" forName="FiveNodes_3" refType="h" fact="0.5"/>
-          <dgm:constr type="ctrX" for="ch" forName="FiveNodes_3" refType="w" fact="0.5"/>
-          <dgm:constr type="w" for="ch" forName="FiveNodes_4" refType="w" fact="0.77"/>
-          <dgm:constr type="h" for="ch" forName="FiveNodes_4" refType="h" fact="0.18"/>
-          <dgm:constr type="ctrY" for="ch" forName="FiveNodes_4" refType="h" fact="0.705"/>
-          <dgm:constr type="ctrX" for="ch" forName="FiveNodes_4" refType="w" fact="0.4425"/>
-          <dgm:constr type="w" for="ch" forName="FiveNodes_5" refType="w" fact="0.77"/>
-          <dgm:constr type="h" for="ch" forName="FiveNodes_5" refType="h" fact="0.18"/>
-          <dgm:constr type="b" for="ch" forName="FiveNodes_5" refType="h"/>
-          <dgm:constr type="l" for="ch" forName="FiveNodes_5"/>
-          <dgm:constr type="w" for="ch" forName="FiveConn_1-2" refType="h" refFor="ch" refForName="FiveNodes_1" fact="0.65"/>
-          <dgm:constr type="h" for="ch" forName="FiveConn_1-2" refType="h" refFor="ch" refForName="FiveNodes_1" fact="0.65"/>
-          <dgm:constr type="ctrY" for="ch" forName="FiveConn_1-2" refType="h" fact="0.19"/>
-          <dgm:constr type="l" for="ch" forName="FiveConn_1-2" refType="l" refFor="ch" refForName="FiveNodes_1"/>
-          <dgm:constr type="w" for="ch" forName="FiveConn_2-3" refType="h" refFor="ch" refForName="FiveNodes_2" fact="0.65"/>
-          <dgm:constr type="h" for="ch" forName="FiveConn_2-3" refType="h" refFor="ch" refForName="FiveNodes_2" fact="0.65"/>
-          <dgm:constr type="ctrY" for="ch" forName="FiveConn_2-3" refType="h" fact="0.395"/>
-          <dgm:constr type="l" for="ch" forName="FiveConn_2-3" refType="l" refFor="ch" refForName="FiveNodes_2"/>
-          <dgm:constr type="w" for="ch" forName="FiveConn_3-4" refType="h" refFor="ch" refForName="FiveNodes_3" fact="0.65"/>
-          <dgm:constr type="h" for="ch" forName="FiveConn_3-4" refType="h" refFor="ch" refForName="FiveNodes_3" fact="0.65"/>
-          <dgm:constr type="ctrY" for="ch" forName="FiveConn_3-4" refType="h" fact="0.597"/>
-          <dgm:constr type="l" for="ch" forName="FiveConn_3-4" refType="l" refFor="ch" refForName="FiveNodes_3"/>
-          <dgm:constr type="w" for="ch" forName="FiveConn_4-5" refType="h" refFor="ch" refForName="FiveNodes_4" fact="0.65"/>
-          <dgm:constr type="h" for="ch" forName="FiveConn_4-5" refType="h" refFor="ch" refForName="FiveNodes_4" fact="0.65"/>
-          <dgm:constr type="ctrY" for="ch" forName="FiveConn_4-5" refType="h" fact="0.804"/>
-          <dgm:constr type="l" for="ch" forName="FiveConn_4-5" refType="l" refFor="ch" refForName="FiveNodes_4"/>
-          <dgm:constr type="l" for="ch" forName="FiveNodes_1_text" refType="r" refFor="ch" refForName="FiveConn_1-2"/>
-          <dgm:constr type="lOff" for="ch" forName="FiveNodes_1_text" refType="w" refFor="ch" refForName="FiveConn_1-2" fact="0.73"/>
-          <dgm:constr type="t" for="ch" forName="FiveNodes_1_text" refType="t" refFor="ch" refForName="FiveNodes_1"/>
-          <dgm:constr type="b" for="ch" forName="FiveNodes_1_text" refType="b" refFor="ch" refForName="FiveNodes_1"/>
-          <dgm:constr type="r" for="ch" forName="FiveNodes_1_text" refType="r" refFor="ch" refForName="FiveNodes_1"/>
-          <dgm:constr type="l" for="ch" forName="FiveNodes_2_text" refType="r" refFor="ch" refForName="FiveConn_1-2"/>
-          <dgm:constr type="t" for="ch" forName="FiveNodes_2_text" refType="t" refFor="ch" refForName="FiveNodes_2"/>
-          <dgm:constr type="b" for="ch" forName="FiveNodes_2_text" refType="b" refFor="ch" refForName="FiveNodes_2"/>
-          <dgm:constr type="r" for="ch" forName="FiveNodes_2_text" refType="r" refFor="ch" refForName="FiveNodes_2"/>
-          <dgm:constr type="l" for="ch" forName="FiveNodes_3_text" refType="r" refFor="ch" refForName="FiveConn_2-3"/>
-          <dgm:constr type="t" for="ch" forName="FiveNodes_3_text" refType="t" refFor="ch" refForName="FiveNodes_3"/>
-          <dgm:constr type="b" for="ch" forName="FiveNodes_3_text" refType="b" refFor="ch" refForName="FiveNodes_3"/>
-          <dgm:constr type="r" for="ch" forName="FiveNodes_3_text" refType="r" refFor="ch" refForName="FiveNodes_3"/>
-          <dgm:constr type="l" for="ch" forName="FiveNodes_4_text" refType="r" refFor="ch" refForName="FiveConn_3-4"/>
-          <dgm:constr type="t" for="ch" forName="FiveNodes_4_text" refType="t" refFor="ch" refForName="FiveNodes_4"/>
-          <dgm:constr type="b" for="ch" forName="FiveNodes_4_text" refType="b" refFor="ch" refForName="FiveNodes_4"/>
-          <dgm:constr type="r" for="ch" forName="FiveNodes_4_text" refType="r" refFor="ch" refForName="FiveNodes_4"/>
-          <dgm:constr type="l" for="ch" forName="FiveNodes_5_text" refType="r" refFor="ch" refForName="FiveConn_4-5"/>
-          <dgm:constr type="t" for="ch" forName="FiveNodes_5_text" refType="t" refFor="ch" refForName="FiveNodes_5"/>
-          <dgm:constr type="b" for="ch" forName="FiveNodes_5_text" refType="b" refFor="ch" refForName="FiveNodes_5"/>
-          <dgm:constr type="r" for="ch" forName="FiveNodes_5_text" refType="r" refFor="ch" refForName="FiveNodes_5"/>
-        </dgm:constrLst>
-      </dgm:else>
-    </dgm:choose>
-    <dgm:ruleLst/>
-    <dgm:layoutNode name="dummyMaxCanvas">
-      <dgm:varLst/>
-      <dgm:alg type="sp"/>
-      <dgm:shape xmlns:r="http://schemas.openxmlformats.org/officeDocument/2006/relationships" r:blip="">
-        <dgm:adjLst/>
-      </dgm:shape>
-      <dgm:presOf/>
-      <dgm:constrLst/>
-      <dgm:ruleLst/>
-    </dgm:layoutNode>
-    <dgm:choose name="Name3">
-      <dgm:if name="Name4" axis="ch" ptType="node" func="cnt" op="equ" val="1">
-        <dgm:layoutNode name="OneNode_1">
-          <dgm:varLst>
-            <dgm:bulletEnabled val="1"/>
-          </dgm:varLst>
-          <dgm:alg type="tx"/>
-          <dgm:shape xmlns:r="http://schemas.openxmlformats.org/officeDocument/2006/relationships" type="roundRect" r:blip="">
-            <dgm:adjLst>
-              <dgm:adj idx="1" val="0.1"/>
-            </dgm:adjLst>
-          </dgm:shape>
-          <dgm:presOf axis="ch desOrSelf" ptType="node node" st="1 1" cnt="1 0"/>
-          <dgm:constrLst>
-            <dgm:constr type="lMarg" refType="primFontSz" fact="0.3"/>
-            <dgm:constr type="rMarg" refType="primFontSz" fact="0.3"/>
-            <dgm:constr type="tMarg" refType="primFontSz" fact="0.3"/>
-            <dgm:constr type="bMarg" refType="primFontSz" fact="0.3"/>
-          </dgm:constrLst>
-          <dgm:ruleLst>
-            <dgm:rule type="primFontSz" val="5" fact="NaN" max="NaN"/>
-          </dgm:ruleLst>
-        </dgm:layoutNode>
-      </dgm:if>
-      <dgm:else name="Name5">
-        <dgm:choose name="Name6">
-          <dgm:if name="Name7" axis="ch" ptType="node" func="cnt" op="equ" val="2">
-            <dgm:layoutNode name="TwoNodes_1">
-              <dgm:varLst>
-                <dgm:bulletEnabled val="1"/>
-              </dgm:varLst>
-              <dgm:alg type="sp"/>
-              <dgm:shape xmlns:r="http://schemas.openxmlformats.org/officeDocument/2006/relationships" type="roundRect" r:blip="">
-                <dgm:adjLst>
-                  <dgm:adj idx="1" val="0.1"/>
-                </dgm:adjLst>
-              </dgm:shape>
-              <dgm:presOf axis="ch desOrSelf" ptType="node node" st="1 1" cnt="1 0"/>
-              <dgm:constrLst/>
-              <dgm:ruleLst/>
-            </dgm:layoutNode>
-            <dgm:layoutNode name="TwoNodes_2">
-              <dgm:varLst>
-                <dgm:bulletEnabled val="1"/>
-              </dgm:varLst>
-              <dgm:alg type="sp"/>
-              <dgm:shape xmlns:r="http://schemas.openxmlformats.org/officeDocument/2006/relationships" type="roundRect" r:blip="">
-                <dgm:adjLst>
-                  <dgm:adj idx="1" val="0.1"/>
-                </dgm:adjLst>
-              </dgm:shape>
-              <dgm:presOf axis="ch desOrSelf" ptType="node node" st="2 1" cnt="1 0"/>
-              <dgm:constrLst/>
-              <dgm:ruleLst/>
-            </dgm:layoutNode>
-            <dgm:layoutNode name="TwoConn_1-2" styleLbl="fgAccFollowNode1">
-              <dgm:varLst>
-                <dgm:bulletEnabled val="1"/>
-              </dgm:varLst>
-              <dgm:alg type="tx"/>
-              <dgm:shape xmlns:r="http://schemas.openxmlformats.org/officeDocument/2006/relationships" type="downArrow" r:blip="">
-                <dgm:adjLst>
-                  <dgm:adj idx="1" val="0.55"/>
-                  <dgm:adj idx="2" val="0.45"/>
-                </dgm:adjLst>
-              </dgm:shape>
-              <dgm:presOf axis="ch" ptType="sibTrans" cnt="1"/>
-              <dgm:constrLst>
-                <dgm:constr type="lMarg" refType="primFontSz" fact="0.1"/>
-                <dgm:constr type="rMarg" refType="primFontSz" fact="0.1"/>
-                <dgm:constr type="tMarg" refType="primFontSz" fact="0.1"/>
-                <dgm:constr type="bMarg" refType="primFontSz" fact="0.1"/>
-              </dgm:constrLst>
-              <dgm:ruleLst>
-                <dgm:rule type="primFontSz" val="5" fact="NaN" max="NaN"/>
-              </dgm:ruleLst>
-            </dgm:layoutNode>
-            <dgm:layoutNode name="TwoNodes_1_text">
-              <dgm:varLst>
-                <dgm:bulletEnabled val="1"/>
-              </dgm:varLst>
-              <dgm:alg type="tx">
-                <dgm:param type="parTxLTRAlign" val="l"/>
-                <dgm:param type="txAnchorVertCh" val="mid"/>
-              </dgm:alg>
-              <dgm:shape xmlns:r="http://schemas.openxmlformats.org/officeDocument/2006/relationships" type="roundRect" r:blip="" hideGeom="1">
-                <dgm:adjLst>
-                  <dgm:adj idx="1" val="0.1"/>
-                </dgm:adjLst>
-              </dgm:shape>
-              <dgm:presOf axis="ch desOrSelf" ptType="node node" st="1 1" cnt="1 0"/>
-              <dgm:constrLst>
-                <dgm:constr type="lMarg" refType="primFontSz" fact="0.3"/>
-                <dgm:constr type="rMarg" refType="primFontSz" fact="0.3"/>
-                <dgm:constr type="tMarg" refType="primFontSz" fact="0.3"/>
-                <dgm:constr type="bMarg" refType="primFontSz" fact="0.3"/>
-              </dgm:constrLst>
-              <dgm:ruleLst>
-                <dgm:rule type="primFontSz" val="5" fact="NaN" max="NaN"/>
-              </dgm:ruleLst>
-            </dgm:layoutNode>
-            <dgm:layoutNode name="TwoNodes_2_text">
-              <dgm:varLst>
-                <dgm:bulletEnabled val="1"/>
-              </dgm:varLst>
-              <dgm:alg type="tx">
-                <dgm:param type="parTxLTRAlign" val="l"/>
-                <dgm:param type="txAnchorVertCh" val="mid"/>
-              </dgm:alg>
-              <dgm:shape xmlns:r="http://schemas.openxmlformats.org/officeDocument/2006/relationships" type="roundRect" r:blip="" hideGeom="1">
-                <dgm:adjLst>
-                  <dgm:adj idx="1" val="0.1"/>
-                </dgm:adjLst>
-              </dgm:shape>
-              <dgm:presOf axis="ch desOrSelf" ptType="node node" st="2 1" cnt="1 0"/>
-              <dgm:constrLst>
-                <dgm:constr type="lMarg" refType="primFontSz" fact="0.3"/>
-                <dgm:constr type="rMarg" refType="primFontSz" fact="0.3"/>
-                <dgm:constr type="tMarg" refType="primFontSz" fact="0.3"/>
-                <dgm:constr type="bMarg" refType="primFontSz" fact="0.3"/>
-              </dgm:constrLst>
-              <dgm:ruleLst>
-                <dgm:rule type="primFontSz" val="5" fact="NaN" max="NaN"/>
-              </dgm:ruleLst>
-            </dgm:layoutNode>
-          </dgm:if>
-          <dgm:else name="Name8">
-            <dgm:choose name="Name9">
-              <dgm:if name="Name10" axis="ch" ptType="node" func="cnt" op="equ" val="3">
-                <dgm:layoutNode name="ThreeNodes_1">
-                  <dgm:varLst>
-                    <dgm:bulletEnabled val="1"/>
-                  </dgm:varLst>
+        <dgm:ruleLst>
+          <dgm:rule type="h" val="INF" fact="NaN" max="NaN"/>
+        </dgm:ruleLst>
+      </dgm:layoutNode>
+      <dgm:choose name="Name1">
+        <dgm:if name="Name2" axis="ch" ptType="node" func="cnt" op="gte" val="1">
+          <dgm:layoutNode name="childText" styleLbl="revTx">
+            <dgm:varLst>
+              <dgm:bulletEnabled val="1"/>
+            </dgm:varLst>
+            <dgm:alg type="tx">
+              <dgm:param type="stBulletLvl" val="1"/>
+              <dgm:param type="lnSpAfChP" val="20"/>
+            </dgm:alg>
+            <dgm:shape xmlns:r="http://schemas.openxmlformats.org/officeDocument/2006/relationships" type="rect" r:blip="">
+              <dgm:adjLst/>
+            </dgm:shape>
+            <dgm:presOf axis="des" ptType="node"/>
+            <dgm:constrLst>
+              <dgm:constr type="tMarg" refType="primFontSz" fact="0.1"/>
+              <dgm:constr type="bMarg" refType="primFontSz" fact="0.1"/>
+              <dgm:constr type="lMarg" refType="w" fact="0.09"/>
+            </dgm:constrLst>
+            <dgm:ruleLst>
+              <dgm:rule type="h" val="INF" fact="NaN" max="NaN"/>
+            </dgm:ruleLst>
+          </dgm:layoutNode>
+        </dgm:if>
+        <dgm:else name="Name3">
+          <dgm:choose name="Name4">
+            <dgm:if name="Name5" axis="par ch" ptType="doc node" func="cnt" op="gte" val="2">
+              <dgm:forEach name="Name6" axis="followSib" ptType="sibTrans" cnt="1">
+                <dgm:layoutNode name="spacer">
                   <dgm:alg type="sp"/>
-                  <dgm:shape xmlns:r="http://schemas.openxmlformats.org/officeDocument/2006/relationships" type="roundRect" r:blip="">
-                    <dgm:adjLst>
-                      <dgm:adj idx="1" val="0.1"/>
-                    </dgm:adjLst>
+                  <dgm:shape xmlns:r="http://schemas.openxmlformats.org/officeDocument/2006/relationships" r:blip="">
+                    <dgm:adjLst/>
                   </dgm:shape>
-                  <dgm:presOf axis="ch desOrSelf" ptType="node node" st="1 1" cnt="1 0"/>
+                  <dgm:presOf/>
                   <dgm:constrLst/>
                   <dgm:ruleLst/>
                 </dgm:layoutNode>
-                <dgm:layoutNode name="ThreeNodes_2">
-                  <dgm:varLst>
-                    <dgm:bulletEnabled val="1"/>
-                  </dgm:varLst>
-                  <dgm:alg type="sp"/>
-                  <dgm:shape xmlns:r="http://schemas.openxmlformats.org/officeDocument/2006/relationships" type="roundRect" r:blip="">
-                    <dgm:adjLst>
-                      <dgm:adj idx="1" val="0.1"/>
-                    </dgm:adjLst>
-                  </dgm:shape>
-                  <dgm:presOf axis="ch desOrSelf" ptType="node node" st="2 1" cnt="1 0"/>
-                  <dgm:constrLst/>
-                  <dgm:ruleLst/>
-                </dgm:layoutNode>
-                <dgm:layoutNode name="ThreeNodes_3">
-                  <dgm:varLst>
-                    <dgm:bulletEnabled val="1"/>
-                  </dgm:varLst>
-                  <dgm:alg type="sp"/>
-                  <dgm:shape xmlns:r="http://schemas.openxmlformats.org/officeDocument/2006/relationships" type="roundRect" r:blip="">
-                    <dgm:adjLst>
-                      <dgm:adj idx="1" val="0.1"/>
-                    </dgm:adjLst>
-                  </dgm:shape>
-                  <dgm:presOf axis="ch desOrSelf" ptType="node node" st="3 1" cnt="1 0"/>
-                  <dgm:constrLst/>
-                  <dgm:ruleLst/>
-                </dgm:layoutNode>
-                <dgm:layoutNode name="ThreeConn_1-2" styleLbl="fgAccFollowNode1">
-                  <dgm:varLst>
-                    <dgm:bulletEnabled val="1"/>
-                  </dgm:varLst>
-                  <dgm:alg type="tx"/>
-                  <dgm:shape xmlns:r="http://schemas.openxmlformats.org/officeDocument/2006/relationships" type="downArrow" r:blip="">
-                    <dgm:adjLst>
-                      <dgm:adj idx="1" val="0.55"/>
-                      <dgm:adj idx="2" val="0.45"/>
-                    </dgm:adjLst>
-                  </dgm:shape>
-                  <dgm:presOf axis="ch" ptType="sibTrans" cnt="1"/>
-                  <dgm:constrLst>
-                    <dgm:constr type="lMarg" refType="primFontSz" fact="0.1"/>
-                    <dgm:constr type="rMarg" refType="primFontSz" fact="0.1"/>
-                    <dgm:constr type="tMarg" refType="primFontSz" fact="0.1"/>
-                    <dgm:constr type="bMarg" refType="primFontSz" fact="0.1"/>
-                  </dgm:constrLst>
-                  <dgm:ruleLst>
-                    <dgm:rule type="primFontSz" val="5" fact="NaN" max="NaN"/>
-                  </dgm:ruleLst>
-                </dgm:layoutNode>
-                <dgm:layoutNode name="ThreeConn_2-3" styleLbl="fgAccFollowNode1">
-                  <dgm:varLst>
-                    <dgm:bulletEnabled val="1"/>
-                  </dgm:varLst>
-                  <dgm:alg type="tx"/>
-                  <dgm:shape xmlns:r="http://schemas.openxmlformats.org/officeDocument/2006/relationships" type="downArrow" r:blip="">
-                    <dgm:adjLst>
-                      <dgm:adj idx="1" val="0.55"/>
-                      <dgm:adj idx="2" val="0.45"/>
-                    </dgm:adjLst>
-                  </dgm:shape>
-                  <dgm:presOf axis="ch" ptType="sibTrans" st="2" cnt="1"/>
-                  <dgm:constrLst>
-                    <dgm:constr type="lMarg" refType="primFontSz" fact="0.1"/>
-                    <dgm:constr type="rMarg" refType="primFontSz" fact="0.1"/>
-                    <dgm:constr type="tMarg" refType="primFontSz" fact="0.1"/>
-                    <dgm:constr type="bMarg" refType="primFontSz" fact="0.1"/>
-                  </dgm:constrLst>
-                  <dgm:ruleLst>
-                    <dgm:rule type="primFontSz" val="5" fact="NaN" max="NaN"/>
-                  </dgm:ruleLst>
-                </dgm:layoutNode>
-                <dgm:layoutNode name="ThreeNodes_1_text">
-                  <dgm:varLst>
-                    <dgm:bulletEnabled val="1"/>
-                  </dgm:varLst>
-                  <dgm:alg type="tx">
-                    <dgm:param type="parTxLTRAlign" val="l"/>
-                    <dgm:param type="txAnchorVertCh" val="mid"/>
-                  </dgm:alg>
-                  <dgm:shape xmlns:r="http://schemas.openxmlformats.org/officeDocument/2006/relationships" type="roundRect" r:blip="" hideGeom="1">
-                    <dgm:adjLst>
-                      <dgm:adj idx="1" val="0.1"/>
-                    </dgm:adjLst>
-                  </dgm:shape>
-                  <dgm:presOf axis="ch desOrSelf" ptType="node node" st="1 1" cnt="1 0"/>
-                  <dgm:constrLst>
-                    <dgm:constr type="lMarg" refType="primFontSz" fact="0.3"/>
-                    <dgm:constr type="rMarg" refType="primFontSz" fact="0.3"/>
-                    <dgm:constr type="tMarg" refType="primFontSz" fact="0.3"/>
-                    <dgm:constr type="bMarg" refType="primFontSz" fact="0.3"/>
-                  </dgm:constrLst>
-                  <dgm:ruleLst>
-                    <dgm:rule type="primFontSz" val="5" fact="NaN" max="NaN"/>
-                  </dgm:ruleLst>
-                </dgm:layoutNode>
-                <dgm:layoutNode name="ThreeNodes_2_text">
-                  <dgm:varLst>
-                    <dgm:bulletEnabled val="1"/>
-                  </dgm:varLst>
-                  <dgm:alg type="tx">
-                    <dgm:param type="parTxLTRAlign" val="l"/>
-                    <dgm:param type="txAnchorVertCh" val="mid"/>
-                  </dgm:alg>
-                  <dgm:shape xmlns:r="http://schemas.openxmlformats.org/officeDocument/2006/relationships" type="roundRect" r:blip="" hideGeom="1">
-                    <dgm:adjLst>
-                      <dgm:adj idx="1" val="0.1"/>
-                    </dgm:adjLst>
-                  </dgm:shape>
-                  <dgm:presOf axis="ch desOrSelf" ptType="node node" st="2 1" cnt="1 0"/>
-                  <dgm:constrLst>
-                    <dgm:constr type="lMarg" refType="primFontSz" fact="0.3"/>
-                    <dgm:constr type="rMarg" refType="primFontSz" fact="0.3"/>
-                    <dgm:constr type="tMarg" refType="primFontSz" fact="0.3"/>
-                    <dgm:constr type="bMarg" refType="primFontSz" fact="0.3"/>
-                  </dgm:constrLst>
-                  <dgm:ruleLst>
-                    <dgm:rule type="primFontSz" val="5" fact="NaN" max="NaN"/>
-                  </dgm:ruleLst>
-                </dgm:layoutNode>
-                <dgm:layoutNode name="ThreeNodes_3_text">
-                  <dgm:varLst>
-                    <dgm:bulletEnabled val="1"/>
-                  </dgm:varLst>
-                  <dgm:alg type="tx">
-                    <dgm:param type="parTxLTRAlign" val="l"/>
-                    <dgm:param type="txAnchorVertCh" val="mid"/>
-                  </dgm:alg>
-                  <dgm:shape xmlns:r="http://schemas.openxmlformats.org/officeDocument/2006/relationships" type="roundRect" r:blip="" hideGeom="1">
-                    <dgm:adjLst>
-                      <dgm:adj idx="1" val="0.1"/>
-                    </dgm:adjLst>
-                  </dgm:shape>
-                  <dgm:presOf axis="ch desOrSelf" ptType="node node" st="3 1" cnt="1 0"/>
-                  <dgm:constrLst>
-                    <dgm:constr type="lMarg" refType="primFontSz" fact="0.3"/>
-                    <dgm:constr type="rMarg" refType="primFontSz" fact="0.3"/>
-                    <dgm:constr type="tMarg" refType="primFontSz" fact="0.3"/>
-                    <dgm:constr type="bMarg" refType="primFontSz" fact="0.3"/>
-                  </dgm:constrLst>
-                  <dgm:ruleLst>
-                    <dgm:rule type="primFontSz" val="5" fact="NaN" max="NaN"/>
-                  </dgm:ruleLst>
-                </dgm:layoutNode>
-              </dgm:if>
-              <dgm:else name="Name11">
-                <dgm:choose name="Name12">
-                  <dgm:if name="Name13" axis="ch" ptType="node" func="cnt" op="equ" val="4">
-                    <dgm:layoutNode name="FourNodes_1">
-                      <dgm:varLst>
-                        <dgm:bulletEnabled val="1"/>
-                      </dgm:varLst>
-                      <dgm:alg type="sp"/>
-                      <dgm:shape xmlns:r="http://schemas.openxmlformats.org/officeDocument/2006/relationships" type="roundRect" r:blip="">
-                        <dgm:adjLst>
-                          <dgm:adj idx="1" val="0.1"/>
-                        </dgm:adjLst>
-                      </dgm:shape>
-                      <dgm:presOf axis="ch desOrSelf" ptType="node node" st="1 1" cnt="1 0"/>
-                      <dgm:constrLst/>
-                      <dgm:ruleLst/>
-                    </dgm:layoutNode>
-                    <dgm:layoutNode name="FourNodes_2">
-                      <dgm:varLst>
-                        <dgm:bulletEnabled val="1"/>
-                      </dgm:varLst>
-                      <dgm:alg type="sp"/>
-                      <dgm:shape xmlns:r="http://schemas.openxmlformats.org/officeDocument/2006/relationships" type="roundRect" r:blip="">
-                        <dgm:adjLst>
-                          <dgm:adj idx="1" val="0.1"/>
-                        </dgm:adjLst>
-                      </dgm:shape>
-                      <dgm:presOf axis="ch desOrSelf" ptType="node node" st="2 1" cnt="1 0"/>
-                      <dgm:constrLst/>
-                      <dgm:ruleLst/>
-                    </dgm:layoutNode>
-                    <dgm:layoutNode name="FourNodes_3">
-                      <dgm:varLst>
-                        <dgm:bulletEnabled val="1"/>
-                      </dgm:varLst>
-                      <dgm:alg type="sp"/>
-                      <dgm:shape xmlns:r="http://schemas.openxmlformats.org/officeDocument/2006/relationships" type="roundRect" r:blip="">
-                        <dgm:adjLst>
-                          <dgm:adj idx="1" val="0.1"/>
-                        </dgm:adjLst>
-                      </dgm:shape>
-                      <dgm:presOf axis="ch desOrSelf" ptType="node node" st="3 1" cnt="1 0"/>
-                      <dgm:constrLst/>
-                      <dgm:ruleLst/>
-                    </dgm:layoutNode>
-                    <dgm:layoutNode name="FourNodes_4">
-                      <dgm:varLst>
-                        <dgm:bulletEnabled val="1"/>
-                      </dgm:varLst>
-                      <dgm:alg type="sp"/>
-                      <dgm:shape xmlns:r="http://schemas.openxmlformats.org/officeDocument/2006/relationships" type="roundRect" r:blip="">
-                        <dgm:adjLst>
-                          <dgm:adj idx="1" val="0.1"/>
-                        </dgm:adjLst>
-                      </dgm:shape>
-                      <dgm:presOf axis="ch desOrSelf" ptType="node node" st="4 1" cnt="1 0"/>
-                      <dgm:constrLst/>
-                      <dgm:ruleLst/>
-                    </dgm:layoutNode>
-                    <dgm:layoutNode name="FourConn_1-2" styleLbl="fgAccFollowNode1">
-                      <dgm:varLst>
-                        <dgm:bulletEnabled val="1"/>
-                      </dgm:varLst>
-                      <dgm:alg type="tx"/>
-                      <dgm:shape xmlns:r="http://schemas.openxmlformats.org/officeDocument/2006/relationships" type="downArrow" r:blip="">
-                        <dgm:adjLst>
-                          <dgm:adj idx="1" val="0.55"/>
-                          <dgm:adj idx="2" val="0.45"/>
-                        </dgm:adjLst>
-                      </dgm:shape>
-                      <dgm:presOf axis="ch" ptType="sibTrans" cnt="1"/>
-                      <dgm:constrLst>
-                        <dgm:constr type="lMarg" refType="primFontSz" fact="0.1"/>
-                        <dgm:constr type="rMarg" refType="primFontSz" fact="0.1"/>
-                        <dgm:constr type="tMarg" refType="primFontSz" fact="0.1"/>
-                        <dgm:constr type="bMarg" refType="primFontSz" fact="0.1"/>
-                      </dgm:constrLst>
-                      <dgm:ruleLst>
-                        <dgm:rule type="primFontSz" val="5" fact="NaN" max="NaN"/>
-                      </dgm:ruleLst>
-                    </dgm:layoutNode>
-                    <dgm:layoutNode name="FourConn_2-3" styleLbl="fgAccFollowNode1">
-                      <dgm:varLst>
-                        <dgm:bulletEnabled val="1"/>
-                      </dgm:varLst>
-                      <dgm:alg type="tx"/>
-                      <dgm:shape xmlns:r="http://schemas.openxmlformats.org/officeDocument/2006/relationships" type="downArrow" r:blip="">
-                        <dgm:adjLst>
-                          <dgm:adj idx="1" val="0.55"/>
-                          <dgm:adj idx="2" val="0.45"/>
-                        </dgm:adjLst>
-                      </dgm:shape>
-                      <dgm:presOf axis="ch" ptType="sibTrans" st="2" cnt="1"/>
-                      <dgm:constrLst>
-                        <dgm:constr type="lMarg" refType="primFontSz" fact="0.1"/>
-                        <dgm:constr type="rMarg" refType="primFontSz" fact="0.1"/>
-                        <dgm:constr type="tMarg" refType="primFontSz" fact="0.1"/>
-                        <dgm:constr type="bMarg" refType="primFontSz" fact="0.1"/>
-                      </dgm:constrLst>
-                      <dgm:ruleLst>
-                        <dgm:rule type="primFontSz" val="5" fact="NaN" max="NaN"/>
-                      </dgm:ruleLst>
-                    </dgm:layoutNode>
-                    <dgm:layoutNode name="FourConn_3-4" styleLbl="fgAccFollowNode1">
-                      <dgm:varLst>
-                        <dgm:bulletEnabled val="1"/>
-                      </dgm:varLst>
-                      <dgm:alg type="tx"/>
-                      <dgm:shape xmlns:r="http://schemas.openxmlformats.org/officeDocument/2006/relationships" type="downArrow" r:blip="">
-                        <dgm:adjLst>
-                          <dgm:adj idx="1" val="0.55"/>
-                          <dgm:adj idx="2" val="0.45"/>
-                        </dgm:adjLst>
-                      </dgm:shape>
-                      <dgm:presOf axis="ch" ptType="sibTrans" st="3" cnt="1"/>
-                      <dgm:constrLst>
-                        <dgm:constr type="lMarg" refType="primFontSz" fact="0.1"/>
-                        <dgm:constr type="rMarg" refType="primFontSz" fact="0.1"/>
-                        <dgm:constr type="tMarg" refType="primFontSz" fact="0.1"/>
-                        <dgm:constr type="bMarg" refType="primFontSz" fact="0.1"/>
-                      </dgm:constrLst>
-                      <dgm:ruleLst>
-                        <dgm:rule type="primFontSz" val="5" fact="NaN" max="NaN"/>
-                      </dgm:ruleLst>
-                    </dgm:layoutNode>
-                    <dgm:layoutNode name="FourNodes_1_text">
-                      <dgm:varLst>
-                        <dgm:bulletEnabled val="1"/>
-                      </dgm:varLst>
-                      <dgm:alg type="tx">
-                        <dgm:param type="parTxLTRAlign" val="l"/>
-                        <dgm:param type="txAnchorVertCh" val="mid"/>
-                      </dgm:alg>
-                      <dgm:shape xmlns:r="http://schemas.openxmlformats.org/officeDocument/2006/relationships" type="roundRect" r:blip="" hideGeom="1">
-                        <dgm:adjLst>
-                          <dgm:adj idx="1" val="0.1"/>
-                        </dgm:adjLst>
-                      </dgm:shape>
-                      <dgm:presOf axis="ch desOrSelf" ptType="node node" st="1 1" cnt="1 0"/>
-                      <dgm:constrLst>
-                        <dgm:constr type="lMarg" refType="primFontSz" fact="0.3"/>
-                        <dgm:constr type="rMarg" refType="primFontSz" fact="0.3"/>
-                        <dgm:constr type="tMarg" refType="primFontSz" fact="0.3"/>
-                        <dgm:constr type="bMarg" refType="primFontSz" fact="0.3"/>
-                      </dgm:constrLst>
-                      <dgm:ruleLst>
-                        <dgm:rule type="primFontSz" val="5" fact="NaN" max="NaN"/>
-                      </dgm:ruleLst>
-                    </dgm:layoutNode>
-                    <dgm:layoutNode name="FourNodes_2_text">
-                      <dgm:varLst>
-                        <dgm:bulletEnabled val="1"/>
-                      </dgm:varLst>
-                      <dgm:alg type="tx">
-                        <dgm:param type="parTxLTRAlign" val="l"/>
-                        <dgm:param type="txAnchorVertCh" val="mid"/>
-                      </dgm:alg>
-                      <dgm:shape xmlns:r="http://schemas.openxmlformats.org/officeDocument/2006/relationships" type="roundRect" r:blip="" hideGeom="1">
-                        <dgm:adjLst>
-                          <dgm:adj idx="1" val="0.1"/>
-                        </dgm:adjLst>
-                      </dgm:shape>
-                      <dgm:presOf axis="ch desOrSelf" ptType="node node" st="2 1" cnt="1 0"/>
-                      <dgm:constrLst>
-                        <dgm:constr type="lMarg" refType="primFontSz" fact="0.3"/>
-                        <dgm:constr type="rMarg" refType="primFontSz" fact="0.3"/>
-                        <dgm:constr type="tMarg" refType="primFontSz" fact="0.3"/>
-                        <dgm:constr type="bMarg" refType="primFontSz" fact="0.3"/>
-                      </dgm:constrLst>
-                      <dgm:ruleLst>
-                        <dgm:rule type="primFontSz" val="5" fact="NaN" max="NaN"/>
-                      </dgm:ruleLst>
-                    </dgm:layoutNode>
-                    <dgm:layoutNode name="FourNodes_3_text">
-                      <dgm:varLst>
-                        <dgm:bulletEnabled val="1"/>
-                      </dgm:varLst>
-                      <dgm:alg type="tx">
-                        <dgm:param type="parTxLTRAlign" val="l"/>
-                        <dgm:param type="txAnchorVertCh" val="mid"/>
-                      </dgm:alg>
-                      <dgm:shape xmlns:r="http://schemas.openxmlformats.org/officeDocument/2006/relationships" type="roundRect" r:blip="" hideGeom="1">
-                        <dgm:adjLst>
-                          <dgm:adj idx="1" val="0.1"/>
-                        </dgm:adjLst>
-                      </dgm:shape>
-                      <dgm:presOf axis="ch desOrSelf" ptType="node node" st="3 1" cnt="1 0"/>
-                      <dgm:constrLst>
-                        <dgm:constr type="lMarg" refType="primFontSz" fact="0.3"/>
-                        <dgm:constr type="rMarg" refType="primFontSz" fact="0.3"/>
-                        <dgm:constr type="tMarg" refType="primFontSz" fact="0.3"/>
-                        <dgm:constr type="bMarg" refType="primFontSz" fact="0.3"/>
-                      </dgm:constrLst>
-                      <dgm:ruleLst>
-                        <dgm:rule type="primFontSz" val="5" fact="NaN" max="NaN"/>
-                      </dgm:ruleLst>
-                    </dgm:layoutNode>
-                    <dgm:layoutNode name="FourNodes_4_text">
-                      <dgm:varLst>
-                        <dgm:bulletEnabled val="1"/>
-                      </dgm:varLst>
-                      <dgm:alg type="tx">
-                        <dgm:param type="parTxLTRAlign" val="l"/>
-                        <dgm:param type="txAnchorVertCh" val="mid"/>
-                      </dgm:alg>
-                      <dgm:shape xmlns:r="http://schemas.openxmlformats.org/officeDocument/2006/relationships" type="roundRect" r:blip="" hideGeom="1">
-                        <dgm:adjLst>
-                          <dgm:adj idx="1" val="0.1"/>
-                        </dgm:adjLst>
-                      </dgm:shape>
-                      <dgm:presOf axis="ch desOrSelf" ptType="node node" st="4 1" cnt="1 0"/>
-                      <dgm:constrLst>
-                        <dgm:constr type="lMarg" refType="primFontSz" fact="0.3"/>
-                        <dgm:constr type="rMarg" refType="primFontSz" fact="0.3"/>
-                        <dgm:constr type="tMarg" refType="primFontSz" fact="0.3"/>
-                        <dgm:constr type="bMarg" refType="primFontSz" fact="0.3"/>
-                      </dgm:constrLst>
-                      <dgm:ruleLst>
-                        <dgm:rule type="primFontSz" val="5" fact="NaN" max="NaN"/>
-                      </dgm:ruleLst>
-                    </dgm:layoutNode>
-                  </dgm:if>
-                  <dgm:else name="Name14">
-                    <dgm:choose name="Name15">
-                      <dgm:if name="Name16" axis="ch" ptType="node" func="cnt" op="gte" val="5">
-                        <dgm:layoutNode name="FiveNodes_1">
-                          <dgm:varLst>
-                            <dgm:bulletEnabled val="1"/>
-                          </dgm:varLst>
-                          <dgm:alg type="sp"/>
-                          <dgm:shape xmlns:r="http://schemas.openxmlformats.org/officeDocument/2006/relationships" type="roundRect" r:blip="">
-                            <dgm:adjLst>
-                              <dgm:adj idx="1" val="0.1"/>
-                            </dgm:adjLst>
-                          </dgm:shape>
-                          <dgm:presOf axis="ch desOrSelf" ptType="node node" st="1 1" cnt="1 0"/>
-                          <dgm:constrLst/>
-                          <dgm:ruleLst/>
-                        </dgm:layoutNode>
-                        <dgm:layoutNode name="FiveNodes_2">
-                          <dgm:varLst>
-                            <dgm:bulletEnabled val="1"/>
-                          </dgm:varLst>
-                          <dgm:alg type="sp"/>
-                          <dgm:shape xmlns:r="http://schemas.openxmlformats.org/officeDocument/2006/relationships" type="roundRect" r:blip="">
-                            <dgm:adjLst>
-                              <dgm:adj idx="1" val="0.1"/>
-                            </dgm:adjLst>
-                          </dgm:shape>
-                          <dgm:presOf axis="ch desOrSelf" ptType="node node" st="2 1" cnt="1 0"/>
-                          <dgm:constrLst/>
-                          <dgm:ruleLst/>
-                        </dgm:layoutNode>
-                        <dgm:layoutNode name="FiveNodes_3">
-                          <dgm:varLst>
-                            <dgm:bulletEnabled val="1"/>
-                          </dgm:varLst>
-                          <dgm:alg type="sp"/>
-                          <dgm:shape xmlns:r="http://schemas.openxmlformats.org/officeDocument/2006/relationships" type="roundRect" r:blip="">
-                            <dgm:adjLst>
-                              <dgm:adj idx="1" val="0.1"/>
-                            </dgm:adjLst>
-                          </dgm:shape>
-                          <dgm:presOf axis="ch desOrSelf" ptType="node node" st="3 1" cnt="1 0"/>
-                          <dgm:constrLst/>
-                          <dgm:ruleLst/>
-                        </dgm:layoutNode>
-                        <dgm:layoutNode name="FiveNodes_4">
-                          <dgm:varLst>
-                            <dgm:bulletEnabled val="1"/>
-                          </dgm:varLst>
-                          <dgm:alg type="sp"/>
-                          <dgm:shape xmlns:r="http://schemas.openxmlformats.org/officeDocument/2006/relationships" type="roundRect" r:blip="">
-                            <dgm:adjLst>
-                              <dgm:adj idx="1" val="0.1"/>
-                            </dgm:adjLst>
-                          </dgm:shape>
-                          <dgm:presOf axis="ch desOrSelf" ptType="node node" st="4 1" cnt="1 0"/>
-                          <dgm:constrLst/>
-                          <dgm:ruleLst/>
-                        </dgm:layoutNode>
-                        <dgm:layoutNode name="FiveNodes_5">
-                          <dgm:varLst>
-                            <dgm:bulletEnabled val="1"/>
-                          </dgm:varLst>
-                          <dgm:alg type="sp"/>
-                          <dgm:shape xmlns:r="http://schemas.openxmlformats.org/officeDocument/2006/relationships" type="roundRect" r:blip="">
-                            <dgm:adjLst>
-                              <dgm:adj idx="1" val="0.1"/>
-                            </dgm:adjLst>
-                          </dgm:shape>
-                          <dgm:presOf axis="ch desOrSelf" ptType="node node" st="5 1" cnt="1 0"/>
-                          <dgm:constrLst/>
-                          <dgm:ruleLst/>
-                        </dgm:layoutNode>
-                        <dgm:layoutNode name="FiveConn_1-2" styleLbl="fgAccFollowNode1">
-                          <dgm:varLst>
-                            <dgm:bulletEnabled val="1"/>
-                          </dgm:varLst>
-                          <dgm:alg type="tx"/>
-                          <dgm:shape xmlns:r="http://schemas.openxmlformats.org/officeDocument/2006/relationships" type="downArrow" r:blip="">
-                            <dgm:adjLst>
-                              <dgm:adj idx="1" val="0.55"/>
-                              <dgm:adj idx="2" val="0.45"/>
-                            </dgm:adjLst>
-                          </dgm:shape>
-                          <dgm:presOf axis="ch" ptType="sibTrans" cnt="1"/>
-                          <dgm:constrLst>
-                            <dgm:constr type="lMarg" refType="primFontSz" fact="0.1"/>
-                            <dgm:constr type="rMarg" refType="primFontSz" fact="0.1"/>
-                            <dgm:constr type="tMarg" refType="primFontSz" fact="0.1"/>
-                            <dgm:constr type="bMarg" refType="primFontSz" fact="0.1"/>
-                          </dgm:constrLst>
-                          <dgm:ruleLst>
-                            <dgm:rule type="primFontSz" val="5" fact="NaN" max="NaN"/>
-                          </dgm:ruleLst>
-                        </dgm:layoutNode>
-                        <dgm:layoutNode name="FiveConn_2-3" styleLbl="fgAccFollowNode1">
-                          <dgm:varLst>
-                            <dgm:bulletEnabled val="1"/>
-                          </dgm:varLst>
-                          <dgm:alg type="tx"/>
-                          <dgm:shape xmlns:r="http://schemas.openxmlformats.org/officeDocument/2006/relationships" type="downArrow" r:blip="">
-                            <dgm:adjLst>
-                              <dgm:adj idx="1" val="0.55"/>
-                              <dgm:adj idx="2" val="0.45"/>
-                            </dgm:adjLst>
-                          </dgm:shape>
-                          <dgm:presOf axis="ch" ptType="sibTrans" st="2" cnt="1"/>
-                          <dgm:constrLst>
-                            <dgm:constr type="lMarg" refType="primFontSz" fact="0.1"/>
-                            <dgm:constr type="rMarg" refType="primFontSz" fact="0.1"/>
-                            <dgm:constr type="tMarg" refType="primFontSz" fact="0.1"/>
-                            <dgm:constr type="bMarg" refType="primFontSz" fact="0.1"/>
-                          </dgm:constrLst>
-                          <dgm:ruleLst>
-                            <dgm:rule type="primFontSz" val="5" fact="NaN" max="NaN"/>
-                          </dgm:ruleLst>
-                        </dgm:layoutNode>
-                        <dgm:layoutNode name="FiveConn_3-4" styleLbl="fgAccFollowNode1">
-                          <dgm:varLst>
-                            <dgm:bulletEnabled val="1"/>
-                          </dgm:varLst>
-                          <dgm:alg type="tx"/>
-                          <dgm:shape xmlns:r="http://schemas.openxmlformats.org/officeDocument/2006/relationships" type="downArrow" r:blip="">
-                            <dgm:adjLst>
-                              <dgm:adj idx="1" val="0.55"/>
-                              <dgm:adj idx="2" val="0.45"/>
-                            </dgm:adjLst>
-                          </dgm:shape>
-                          <dgm:presOf axis="ch" ptType="sibTrans" st="3" cnt="1"/>
-                          <dgm:constrLst>
-                            <dgm:constr type="lMarg" refType="primFontSz" fact="0.1"/>
-                            <dgm:constr type="rMarg" refType="primFontSz" fact="0.1"/>
-                            <dgm:constr type="tMarg" refType="primFontSz" fact="0.1"/>
-                            <dgm:constr type="bMarg" refType="primFontSz" fact="0.1"/>
-                          </dgm:constrLst>
-                          <dgm:ruleLst>
-                            <dgm:rule type="primFontSz" val="5" fact="NaN" max="NaN"/>
-                          </dgm:ruleLst>
-                        </dgm:layoutNode>
-                        <dgm:layoutNode name="FiveConn_4-5" styleLbl="fgAccFollowNode1">
-                          <dgm:varLst>
-                            <dgm:bulletEnabled val="1"/>
-                          </dgm:varLst>
-                          <dgm:alg type="tx"/>
-                          <dgm:shape xmlns:r="http://schemas.openxmlformats.org/officeDocument/2006/relationships" type="downArrow" r:blip="">
-                            <dgm:adjLst>
-                              <dgm:adj idx="1" val="0.55"/>
-                              <dgm:adj idx="2" val="0.45"/>
-                            </dgm:adjLst>
-                          </dgm:shape>
-                          <dgm:presOf axis="ch" ptType="sibTrans" st="4" cnt="1"/>
-                          <dgm:constrLst>
-                            <dgm:constr type="lMarg" refType="primFontSz" fact="0.1"/>
-                            <dgm:constr type="rMarg" refType="primFontSz" fact="0.1"/>
-                            <dgm:constr type="tMarg" refType="primFontSz" fact="0.1"/>
-                            <dgm:constr type="bMarg" refType="primFontSz" fact="0.1"/>
-                          </dgm:constrLst>
-                          <dgm:ruleLst>
-                            <dgm:rule type="primFontSz" val="5" fact="NaN" max="NaN"/>
-                          </dgm:ruleLst>
-                        </dgm:layoutNode>
-                        <dgm:layoutNode name="FiveNodes_1_text">
-                          <dgm:varLst>
-                            <dgm:bulletEnabled val="1"/>
-                          </dgm:varLst>
-                          <dgm:alg type="tx">
-                            <dgm:param type="parTxLTRAlign" val="l"/>
-                            <dgm:param type="txAnchorVertCh" val="mid"/>
-                          </dgm:alg>
-                          <dgm:shape xmlns:r="http://schemas.openxmlformats.org/officeDocument/2006/relationships" type="roundRect" r:blip="" hideGeom="1">
-                            <dgm:adjLst>
-                              <dgm:adj idx="1" val="0.1"/>
-                            </dgm:adjLst>
-                          </dgm:shape>
-                          <dgm:presOf axis="ch desOrSelf" ptType="node node" st="1 1" cnt="1 0"/>
-                          <dgm:constrLst>
-                            <dgm:constr type="lMarg" refType="primFontSz" fact="0.3"/>
-                            <dgm:constr type="rMarg" refType="primFontSz" fact="0.3"/>
-                            <dgm:constr type="tMarg" refType="primFontSz" fact="0.3"/>
-                            <dgm:constr type="bMarg" refType="primFontSz" fact="0.3"/>
-                          </dgm:constrLst>
-                          <dgm:ruleLst>
-                            <dgm:rule type="primFontSz" val="5" fact="NaN" max="NaN"/>
-                          </dgm:ruleLst>
-                        </dgm:layoutNode>
-                        <dgm:layoutNode name="FiveNodes_2_text">
-                          <dgm:varLst>
-                            <dgm:bulletEnabled val="1"/>
-                          </dgm:varLst>
-                          <dgm:alg type="tx">
-                            <dgm:param type="parTxLTRAlign" val="l"/>
-                            <dgm:param type="txAnchorVertCh" val="mid"/>
-                          </dgm:alg>
-                          <dgm:shape xmlns:r="http://schemas.openxmlformats.org/officeDocument/2006/relationships" type="roundRect" r:blip="" hideGeom="1">
-                            <dgm:adjLst>
-                              <dgm:adj idx="1" val="0.1"/>
-                            </dgm:adjLst>
-                          </dgm:shape>
-                          <dgm:presOf axis="ch desOrSelf" ptType="node node" st="2 1" cnt="1 0"/>
-                          <dgm:constrLst>
-                            <dgm:constr type="lMarg" refType="primFontSz" fact="0.3"/>
-                            <dgm:constr type="rMarg" refType="primFontSz" fact="0.3"/>
-                            <dgm:constr type="tMarg" refType="primFontSz" fact="0.3"/>
-                            <dgm:constr type="bMarg" refType="primFontSz" fact="0.3"/>
-                          </dgm:constrLst>
-                          <dgm:ruleLst>
-                            <dgm:rule type="primFontSz" val="5" fact="NaN" max="NaN"/>
-                          </dgm:ruleLst>
-                        </dgm:layoutNode>
-                        <dgm:layoutNode name="FiveNodes_3_text">
-                          <dgm:varLst>
-                            <dgm:bulletEnabled val="1"/>
-                          </dgm:varLst>
-                          <dgm:alg type="tx">
-                            <dgm:param type="parTxLTRAlign" val="l"/>
-                            <dgm:param type="txAnchorVertCh" val="mid"/>
-                          </dgm:alg>
-                          <dgm:shape xmlns:r="http://schemas.openxmlformats.org/officeDocument/2006/relationships" type="roundRect" r:blip="" hideGeom="1">
-                            <dgm:adjLst>
-                              <dgm:adj idx="1" val="0.1"/>
-                            </dgm:adjLst>
-                          </dgm:shape>
-                          <dgm:presOf axis="ch desOrSelf" ptType="node node" st="3 1" cnt="1 0"/>
-                          <dgm:constrLst>
-                            <dgm:constr type="lMarg" refType="primFontSz" fact="0.3"/>
-                            <dgm:constr type="rMarg" refType="primFontSz" fact="0.3"/>
-                            <dgm:constr type="tMarg" refType="primFontSz" fact="0.3"/>
-                            <dgm:constr type="bMarg" refType="primFontSz" fact="0.3"/>
-                          </dgm:constrLst>
-                          <dgm:ruleLst>
-                            <dgm:rule type="primFontSz" val="5" fact="NaN" max="NaN"/>
-                          </dgm:ruleLst>
-                        </dgm:layoutNode>
-                        <dgm:layoutNode name="FiveNodes_4_text">
-                          <dgm:varLst>
-                            <dgm:bulletEnabled val="1"/>
-                          </dgm:varLst>
-                          <dgm:alg type="tx">
-                            <dgm:param type="parTxLTRAlign" val="l"/>
-                            <dgm:param type="txAnchorVertCh" val="mid"/>
-                          </dgm:alg>
-                          <dgm:shape xmlns:r="http://schemas.openxmlformats.org/officeDocument/2006/relationships" type="roundRect" r:blip="" hideGeom="1">
-                            <dgm:adjLst>
-                              <dgm:adj idx="1" val="0.1"/>
-                            </dgm:adjLst>
-                          </dgm:shape>
-                          <dgm:presOf axis="ch desOrSelf" ptType="node node" st="4 1" cnt="1 0"/>
-                          <dgm:constrLst>
-                            <dgm:constr type="lMarg" refType="primFontSz" fact="0.3"/>
-                            <dgm:constr type="rMarg" refType="primFontSz" fact="0.3"/>
-                            <dgm:constr type="tMarg" refType="primFontSz" fact="0.3"/>
-                            <dgm:constr type="bMarg" refType="primFontSz" fact="0.3"/>
-                          </dgm:constrLst>
-                          <dgm:ruleLst>
-                            <dgm:rule type="primFontSz" val="5" fact="NaN" max="NaN"/>
-                          </dgm:ruleLst>
-                        </dgm:layoutNode>
-                        <dgm:layoutNode name="FiveNodes_5_text">
-                          <dgm:varLst>
-                            <dgm:bulletEnabled val="1"/>
-                          </dgm:varLst>
-                          <dgm:alg type="tx">
-                            <dgm:param type="parTxLTRAlign" val="l"/>
-                            <dgm:param type="txAnchorVertCh" val="mid"/>
-                          </dgm:alg>
-                          <dgm:shape xmlns:r="http://schemas.openxmlformats.org/officeDocument/2006/relationships" type="roundRect" r:blip="" hideGeom="1">
-                            <dgm:adjLst>
-                              <dgm:adj idx="1" val="0.1"/>
-                            </dgm:adjLst>
-                          </dgm:shape>
-                          <dgm:presOf axis="ch desOrSelf" ptType="node node" st="5 1" cnt="1 0"/>
-                          <dgm:constrLst>
-                            <dgm:constr type="lMarg" refType="primFontSz" fact="0.3"/>
-                            <dgm:constr type="rMarg" refType="primFontSz" fact="0.3"/>
-                            <dgm:constr type="tMarg" refType="primFontSz" fact="0.3"/>
-                            <dgm:constr type="bMarg" refType="primFontSz" fact="0.3"/>
-                          </dgm:constrLst>
-                          <dgm:ruleLst>
-                            <dgm:rule type="primFontSz" val="5" fact="NaN" max="NaN"/>
-                          </dgm:ruleLst>
-                        </dgm:layoutNode>
-                      </dgm:if>
-                      <dgm:else name="Name17"/>
-                    </dgm:choose>
-                  </dgm:else>
-                </dgm:choose>
-              </dgm:else>
-            </dgm:choose>
-          </dgm:else>
-        </dgm:choose>
-      </dgm:else>
-    </dgm:choose>
+              </dgm:forEach>
+            </dgm:if>
+            <dgm:else name="Name7"/>
+          </dgm:choose>
+        </dgm:else>
+      </dgm:choose>
+    </dgm:forEach>
   </dgm:layoutNode>
 </dgm:layoutDef>
 </file>
@@ -13635,7 +12229,7 @@
           <a:p>
             <a:fld id="{0ADD3A9B-7D3C-4B1E-B5BD-8E6B35C31113}" type="datetimeFigureOut">
               <a:rPr lang="en-IE" smtClean="0"/>
-              <a:t>07/04/2026</a:t>
+              <a:t>10/04/2026</a:t>
             </a:fld>
             <a:endParaRPr lang="en-IE"/>
           </a:p>
@@ -15628,7 +14222,7 @@
           <a:p>
             <a:fld id="{9184DA70-C731-4C70-880D-CCD4705E623C}" type="datetime1">
               <a:rPr lang="en-US" smtClean="0"/>
-              <a:t>4/7/2026</a:t>
+              <a:t>4/10/2026</a:t>
             </a:fld>
             <a:endParaRPr lang="en-US" dirty="0"/>
           </a:p>
@@ -15816,7 +14410,7 @@
           <a:p>
             <a:fld id="{B612A279-0833-481D-8C56-F67FD0AC6C50}" type="datetime1">
               <a:rPr lang="en-US" smtClean="0"/>
-              <a:t>4/7/2026</a:t>
+              <a:t>4/10/2026</a:t>
             </a:fld>
             <a:endParaRPr lang="en-US" dirty="0"/>
           </a:p>
@@ -16058,7 +14652,7 @@
           <a:p>
             <a:fld id="{6587DA83-5663-4C9C-B9AA-0B40A3DAFF81}" type="datetime1">
               <a:rPr lang="en-US" smtClean="0"/>
-              <a:t>4/7/2026</a:t>
+              <a:t>4/10/2026</a:t>
             </a:fld>
             <a:endParaRPr lang="en-US" dirty="0"/>
           </a:p>
@@ -16246,7 +14840,7 @@
           <a:p>
             <a:fld id="{4BE1D723-8F53-4F53-90B0-1982A396982E}" type="datetime1">
               <a:rPr lang="en-US" smtClean="0"/>
-              <a:t>4/7/2026</a:t>
+              <a:t>4/10/2026</a:t>
             </a:fld>
             <a:endParaRPr lang="en-US" dirty="0"/>
           </a:p>
@@ -16619,7 +15213,7 @@
           <a:p>
             <a:fld id="{97669AF7-7BEB-44E4-9852-375E34362B5B}" type="datetime1">
               <a:rPr lang="en-US" smtClean="0"/>
-              <a:t>4/7/2026</a:t>
+              <a:t>4/10/2026</a:t>
             </a:fld>
             <a:endParaRPr lang="en-US" dirty="0"/>
           </a:p>
@@ -16874,7 +15468,7 @@
           <a:p>
             <a:fld id="{BAAAC38D-0552-4C82-B593-E6124DFADBE2}" type="datetime1">
               <a:rPr lang="en-US" smtClean="0"/>
-              <a:t>4/7/2026</a:t>
+              <a:t>4/10/2026</a:t>
             </a:fld>
             <a:endParaRPr lang="en-US" dirty="0"/>
           </a:p>
@@ -17271,7 +15865,7 @@
           <a:p>
             <a:fld id="{D9DF0F1C-5577-4ACB-BB62-DF8F3C494C7E}" type="datetime1">
               <a:rPr lang="en-US" smtClean="0"/>
-              <a:t>4/7/2026</a:t>
+              <a:t>4/10/2026</a:t>
             </a:fld>
             <a:endParaRPr lang="en-US" dirty="0"/>
           </a:p>
@@ -17407,7 +16001,7 @@
           <a:p>
             <a:fld id="{1775B394-D9F9-4F0C-B15D-605F45CB9E9F}" type="datetime1">
               <a:rPr lang="en-US" smtClean="0"/>
-              <a:t>4/7/2026</a:t>
+              <a:t>4/10/2026</a:t>
             </a:fld>
             <a:endParaRPr lang="en-US" dirty="0"/>
           </a:p>
@@ -17564,7 +16158,7 @@
           <a:p>
             <a:fld id="{39667345-2558-425A-8533-9BFDBCE15005}" type="datetime1">
               <a:rPr lang="en-US" smtClean="0"/>
-              <a:t>4/7/2026</a:t>
+              <a:t>4/10/2026</a:t>
             </a:fld>
             <a:endParaRPr lang="en-US" dirty="0"/>
           </a:p>
@@ -17893,7 +16487,7 @@
           <a:p>
             <a:fld id="{92BEA474-078D-4E9B-9B14-09A87B19DC46}" type="datetime1">
               <a:rPr lang="en-US" smtClean="0"/>
-              <a:t>4/7/2026</a:t>
+              <a:t>4/10/2026</a:t>
             </a:fld>
             <a:endParaRPr lang="en-US" dirty="0"/>
           </a:p>
@@ -18243,7 +16837,7 @@
           <a:p>
             <a:fld id="{4907D986-8816-4272-A432-0437A28A9828}" type="datetime1">
               <a:rPr lang="en-US" smtClean="0"/>
-              <a:t>4/7/2026</a:t>
+              <a:t>4/10/2026</a:t>
             </a:fld>
             <a:endParaRPr lang="en-US" dirty="0"/>
           </a:p>
@@ -18511,7 +17105,7 @@
           <a:p>
             <a:fld id="{62D6E202-B606-4609-B914-27C9371A1F6D}" type="datetime1">
               <a:rPr lang="en-US" smtClean="0"/>
-              <a:t>4/7/2026</a:t>
+              <a:t>4/10/2026</a:t>
             </a:fld>
             <a:endParaRPr lang="en-US" dirty="0"/>
           </a:p>
@@ -19651,12 +18245,12 @@
           <a:chExt cx="0" cy="0"/>
         </a:xfrm>
       </p:grpSpPr>
-      <p:sp useBgFill="1">
+      <p:sp>
         <p:nvSpPr>
-          <p:cNvPr id="9" name="Rectangle 8">
+          <p:cNvPr id="28" name="Rectangle 27">
             <a:extLst>
               <a:ext uri="{FF2B5EF4-FFF2-40B4-BE49-F238E27FC236}">
-                <a16:creationId xmlns:a16="http://schemas.microsoft.com/office/drawing/2014/main" id="{88F0A37D-2337-4AAF-98B0-7E4E9B98719A}"/>
+                <a16:creationId xmlns:a16="http://schemas.microsoft.com/office/drawing/2014/main" id="{E844E128-FF69-4E9F-8327-6B504B3C5AE1}"/>
               </a:ext>
               <a:ext uri="{C183D7F6-B498-43B3-948B-1728B52AA6E4}">
                 <adec:decorative xmlns:adec="http://schemas.microsoft.com/office/drawing/2017/decorative" val="1"/>
@@ -19674,160 +18268,10 @@
             </p:extLst>
           </p:nvPr>
         </p:nvSpPr>
-        <p:spPr>
+        <p:spPr bwMode="white">
           <a:xfrm>
-            <a:off x="0" y="0"/>
-            <a:ext cx="12192000" cy="6858000"/>
-          </a:xfrm>
-          <a:prstGeom prst="rect">
-            <a:avLst/>
-          </a:prstGeom>
-          <a:ln>
-            <a:noFill/>
-          </a:ln>
-        </p:spPr>
-        <p:style>
-          <a:lnRef idx="2">
-            <a:schemeClr val="accent1">
-              <a:shade val="50000"/>
-            </a:schemeClr>
-          </a:lnRef>
-          <a:fillRef idx="1">
-            <a:schemeClr val="accent1"/>
-          </a:fillRef>
-          <a:effectRef idx="0">
-            <a:schemeClr val="accent1"/>
-          </a:effectRef>
-          <a:fontRef idx="minor">
-            <a:schemeClr val="lt1"/>
-          </a:fontRef>
-        </p:style>
-        <p:txBody>
-          <a:bodyPr rtlCol="0" anchor="ctr"/>
-          <a:lstStyle/>
-          <a:p>
-            <a:pPr algn="ctr"/>
-            <a:endParaRPr lang="en-US"/>
-          </a:p>
-        </p:txBody>
-      </p:sp>
-      <p:sp>
-        <p:nvSpPr>
-          <p:cNvPr id="2" name="Title 1">
-            <a:extLst>
-              <a:ext uri="{FF2B5EF4-FFF2-40B4-BE49-F238E27FC236}">
-                <a16:creationId xmlns:a16="http://schemas.microsoft.com/office/drawing/2014/main" id="{D46FA479-45B9-E724-9789-338CD13B8472}"/>
-              </a:ext>
-            </a:extLst>
-          </p:cNvPr>
-          <p:cNvSpPr>
-            <a:spLocks noGrp="1"/>
-          </p:cNvSpPr>
-          <p:nvPr>
-            <p:ph type="title"/>
-          </p:nvPr>
-        </p:nvSpPr>
-        <p:spPr>
-          <a:xfrm>
-            <a:off x="1097280" y="286603"/>
-            <a:ext cx="10058400" cy="1450757"/>
-          </a:xfrm>
-        </p:spPr>
-        <p:txBody>
-          <a:bodyPr>
-            <a:normAutofit/>
-          </a:bodyPr>
-          <a:lstStyle/>
-          <a:p>
-            <a:r>
-              <a:rPr lang="en-IE" dirty="0"/>
-              <a:t>Confusion Matrix</a:t>
-            </a:r>
-          </a:p>
-        </p:txBody>
-      </p:sp>
-      <p:cxnSp>
-        <p:nvCxnSpPr>
-          <p:cNvPr id="11" name="Straight Connector 10">
-            <a:extLst>
-              <a:ext uri="{FF2B5EF4-FFF2-40B4-BE49-F238E27FC236}">
-                <a16:creationId xmlns:a16="http://schemas.microsoft.com/office/drawing/2014/main" id="{F15CCCF0-E573-463A-9760-1FDC0B2CFBD7}"/>
-              </a:ext>
-              <a:ext uri="{C183D7F6-B498-43B3-948B-1728B52AA6E4}">
-                <adec:decorative xmlns:adec="http://schemas.microsoft.com/office/drawing/2017/decorative" val="1"/>
-              </a:ext>
-            </a:extLst>
-          </p:cNvPr>
-          <p:cNvCxnSpPr>
-            <a:cxnSpLocks noGrp="1" noRot="1" noChangeAspect="1" noMove="1" noResize="1" noEditPoints="1" noAdjustHandles="1" noChangeArrowheads="1" noChangeShapeType="1"/>
-          </p:cNvCxnSpPr>
-          <p:nvPr>
-            <p:extLst>
-              <p:ext uri="{386F3935-93C4-4BCD-93E2-E3B085C9AB24}">
-                <p16:designElem xmlns:p16="http://schemas.microsoft.com/office/powerpoint/2015/main" val="1"/>
-              </p:ext>
-            </p:extLst>
-          </p:nvPr>
-        </p:nvCxnSpPr>
-        <p:spPr>
-          <a:xfrm>
-            <a:off x="1193532" y="1897380"/>
-            <a:ext cx="9966960" cy="0"/>
-          </a:xfrm>
-          <a:prstGeom prst="line">
-            <a:avLst/>
-          </a:prstGeom>
-          <a:ln w="12700">
-            <a:solidFill>
-              <a:schemeClr val="tx1">
-                <a:lumMod val="75000"/>
-                <a:lumOff val="25000"/>
-              </a:schemeClr>
-            </a:solidFill>
-          </a:ln>
-        </p:spPr>
-        <p:style>
-          <a:lnRef idx="1">
-            <a:schemeClr val="accent1"/>
-          </a:lnRef>
-          <a:fillRef idx="0">
-            <a:schemeClr val="accent1"/>
-          </a:fillRef>
-          <a:effectRef idx="0">
-            <a:schemeClr val="accent1"/>
-          </a:effectRef>
-          <a:fontRef idx="minor">
-            <a:schemeClr val="tx1"/>
-          </a:fontRef>
-        </p:style>
-      </p:cxnSp>
-      <p:sp>
-        <p:nvSpPr>
-          <p:cNvPr id="13" name="Rectangle 12">
-            <a:extLst>
-              <a:ext uri="{FF2B5EF4-FFF2-40B4-BE49-F238E27FC236}">
-                <a16:creationId xmlns:a16="http://schemas.microsoft.com/office/drawing/2014/main" id="{F7234D70-FB65-4E99-985E-64D219674D45}"/>
-              </a:ext>
-              <a:ext uri="{C183D7F6-B498-43B3-948B-1728B52AA6E4}">
-                <adec:decorative xmlns:adec="http://schemas.microsoft.com/office/drawing/2017/decorative" val="1"/>
-              </a:ext>
-            </a:extLst>
-          </p:cNvPr>
-          <p:cNvSpPr>
-            <a:spLocks noGrp="1" noRot="1" noChangeAspect="1" noMove="1" noResize="1" noEditPoints="1" noAdjustHandles="1" noChangeArrowheads="1" noChangeShapeType="1" noTextEdit="1"/>
-          </p:cNvSpPr>
-          <p:nvPr>
-            <p:extLst>
-              <p:ext uri="{386F3935-93C4-4BCD-93E2-E3B085C9AB24}">
-                <p16:designElem xmlns:p16="http://schemas.microsoft.com/office/powerpoint/2015/main" val="1"/>
-              </p:ext>
-            </p:extLst>
-          </p:nvPr>
-        </p:nvSpPr>
-        <p:spPr>
-          <a:xfrm>
-            <a:off x="0" y="6400800"/>
-            <a:ext cx="12192000" cy="457200"/>
+            <a:off x="15" y="0"/>
+            <a:ext cx="12191985" cy="6858000"/>
           </a:xfrm>
           <a:prstGeom prst="rect">
             <a:avLst/>
@@ -19863,6 +18307,128 @@
           </a:p>
         </p:txBody>
       </p:sp>
+      <p:sp>
+        <p:nvSpPr>
+          <p:cNvPr id="2" name="Title 1">
+            <a:extLst>
+              <a:ext uri="{FF2B5EF4-FFF2-40B4-BE49-F238E27FC236}">
+                <a16:creationId xmlns:a16="http://schemas.microsoft.com/office/drawing/2014/main" id="{D46FA479-45B9-E724-9789-338CD13B8472}"/>
+              </a:ext>
+            </a:extLst>
+          </p:cNvPr>
+          <p:cNvSpPr>
+            <a:spLocks noGrp="1"/>
+          </p:cNvSpPr>
+          <p:nvPr>
+            <p:ph type="title"/>
+          </p:nvPr>
+        </p:nvSpPr>
+        <p:spPr>
+          <a:xfrm>
+            <a:off x="643467" y="516835"/>
+            <a:ext cx="3448259" cy="1666501"/>
+          </a:xfrm>
+        </p:spPr>
+        <p:txBody>
+          <a:bodyPr>
+            <a:normAutofit/>
+          </a:bodyPr>
+          <a:lstStyle/>
+          <a:p>
+            <a:r>
+              <a:rPr lang="en-IE" sz="4000">
+                <a:solidFill>
+                  <a:srgbClr val="FFFFFF"/>
+                </a:solidFill>
+              </a:rPr>
+              <a:t>Confusion Matrix</a:t>
+            </a:r>
+          </a:p>
+        </p:txBody>
+      </p:sp>
+      <p:cxnSp>
+        <p:nvCxnSpPr>
+          <p:cNvPr id="30" name="Straight Connector 29">
+            <a:extLst>
+              <a:ext uri="{FF2B5EF4-FFF2-40B4-BE49-F238E27FC236}">
+                <a16:creationId xmlns:a16="http://schemas.microsoft.com/office/drawing/2014/main" id="{055CEADF-09EA-423C-8C45-F94AF44D5AF0}"/>
+              </a:ext>
+              <a:ext uri="{C183D7F6-B498-43B3-948B-1728B52AA6E4}">
+                <adec:decorative xmlns:adec="http://schemas.microsoft.com/office/drawing/2017/decorative" val="1"/>
+              </a:ext>
+            </a:extLst>
+          </p:cNvPr>
+          <p:cNvCxnSpPr>
+            <a:cxnSpLocks noGrp="1" noRot="1" noChangeAspect="1" noMove="1" noResize="1" noEditPoints="1" noAdjustHandles="1" noChangeArrowheads="1" noChangeShapeType="1"/>
+          </p:cNvCxnSpPr>
+          <p:nvPr>
+            <p:extLst>
+              <p:ext uri="{386F3935-93C4-4BCD-93E2-E3B085C9AB24}">
+                <p16:designElem xmlns:p16="http://schemas.microsoft.com/office/powerpoint/2015/main" val="1"/>
+              </p:ext>
+            </p:extLst>
+          </p:nvPr>
+        </p:nvCxnSpPr>
+        <p:spPr>
+          <a:xfrm>
+            <a:off x="723686" y="2353592"/>
+            <a:ext cx="3291840" cy="0"/>
+          </a:xfrm>
+          <a:prstGeom prst="line">
+            <a:avLst/>
+          </a:prstGeom>
+          <a:ln w="19050">
+            <a:solidFill>
+              <a:schemeClr val="accent1"/>
+            </a:solidFill>
+          </a:ln>
+        </p:spPr>
+        <p:style>
+          <a:lnRef idx="1">
+            <a:schemeClr val="accent1"/>
+          </a:lnRef>
+          <a:fillRef idx="0">
+            <a:schemeClr val="accent1"/>
+          </a:fillRef>
+          <a:effectRef idx="0">
+            <a:schemeClr val="accent1"/>
+          </a:effectRef>
+          <a:fontRef idx="minor">
+            <a:schemeClr val="tx1"/>
+          </a:fontRef>
+        </p:style>
+      </p:cxnSp>
+      <p:pic>
+        <p:nvPicPr>
+          <p:cNvPr id="8" name="Picture 7">
+            <a:extLst>
+              <a:ext uri="{FF2B5EF4-FFF2-40B4-BE49-F238E27FC236}">
+                <a16:creationId xmlns:a16="http://schemas.microsoft.com/office/drawing/2014/main" id="{17FCF148-320F-31E6-93DB-1BCB3BD823EB}"/>
+              </a:ext>
+            </a:extLst>
+          </p:cNvPr>
+          <p:cNvPicPr>
+            <a:picLocks noChangeAspect="1"/>
+          </p:cNvPicPr>
+          <p:nvPr/>
+        </p:nvPicPr>
+        <p:blipFill>
+          <a:blip r:embed="rId3"/>
+          <a:srcRect l="7853" r="9714"/>
+          <a:stretch>
+            <a:fillRect/>
+          </a:stretch>
+        </p:blipFill>
+        <p:spPr>
+          <a:xfrm>
+            <a:off x="4654296" y="10"/>
+            <a:ext cx="7537703" cy="6857990"/>
+          </a:xfrm>
+          <a:prstGeom prst="rect">
+            <a:avLst/>
+          </a:prstGeom>
+        </p:spPr>
+      </p:pic>
       <p:graphicFrame>
         <p:nvGraphicFramePr>
           <p:cNvPr id="5" name="Content Placeholder 2">
@@ -19879,18 +18445,18 @@
             <p:ph idx="1"/>
             <p:extLst>
               <p:ext uri="{D42A27DB-BD31-4B8C-83A1-F6EECF244321}">
-                <p14:modId xmlns:p14="http://schemas.microsoft.com/office/powerpoint/2010/main" val="1174128059"/>
+                <p14:modId xmlns:p14="http://schemas.microsoft.com/office/powerpoint/2010/main" val="1109321919"/>
               </p:ext>
             </p:extLst>
           </p:nvPr>
         </p:nvGraphicFramePr>
         <p:xfrm>
-          <a:off x="1096963" y="2098515"/>
-          <a:ext cx="10058400" cy="3786080"/>
+          <a:off x="643467" y="2546224"/>
+          <a:ext cx="3448259" cy="3342747"/>
         </p:xfrm>
         <a:graphic>
           <a:graphicData uri="http://schemas.openxmlformats.org/drawingml/2006/diagram">
-            <dgm:relIds xmlns:dgm="http://schemas.openxmlformats.org/drawingml/2006/diagram" xmlns:r="http://schemas.openxmlformats.org/officeDocument/2006/relationships" r:dm="rId3" r:lo="rId4" r:qs="rId5" r:cs="rId6"/>
+            <dgm:relIds xmlns:dgm="http://schemas.openxmlformats.org/drawingml/2006/diagram" xmlns:r="http://schemas.openxmlformats.org/officeDocument/2006/relationships" r:dm="rId4" r:lo="rId5" r:qs="rId6" r:cs="rId7"/>
           </a:graphicData>
         </a:graphic>
       </p:graphicFrame>
@@ -19902,7 +18468,7 @@
     </p:extLst>
   </p:cSld>
   <p:clrMapOvr>
-    <a:masterClrMapping/>
+    <a:overrideClrMapping bg1="dk1" tx1="lt1" bg2="dk2" tx2="lt2" accent1="accent1" accent2="accent2" accent3="accent3" accent4="accent4" accent5="accent5" accent6="accent6" hlink="hlink" folHlink="folHlink"/>
   </p:clrMapOvr>
 </p:sld>
 </file>
